--- a/public/lessons/year-6-maths/spring/week-20/diagnose-ratio-misconceptions/teaching-powerpoint-v1.pptx
+++ b/public/lessons/year-6-maths/spring/week-20/diagnose-ratio-misconceptions/teaching-powerpoint-v1.pptx
@@ -2,24 +2,24 @@
 <file path=ppt/presentation.xml><?xml version="1.0" encoding="utf-8"?>
 <p:presentation xmlns:p="http://schemas.openxmlformats.org/presentationml/2006/main">
   <p:sldMasterIdLst>
-    <p:sldMasterId xmlns:r="http://schemas.openxmlformats.org/officeDocument/2006/relationships" id="2147483648" r:id="Ra702db3bfafd4d67"/>
+    <p:sldMasterId xmlns:r="http://schemas.openxmlformats.org/officeDocument/2006/relationships" id="2147483648" r:id="R894fae357cd14122"/>
   </p:sldMasterIdLst>
   <p:notesMasterIdLst>
-    <p:notesMasterId xmlns:r="http://schemas.openxmlformats.org/officeDocument/2006/relationships" r:id="R893c64a3cdc04e1c"/>
+    <p:notesMasterId xmlns:r="http://schemas.openxmlformats.org/officeDocument/2006/relationships" r:id="R670d39e025654d69"/>
   </p:notesMasterIdLst>
   <p:sldIdLst>
-    <p:sldId xmlns:r="http://schemas.openxmlformats.org/officeDocument/2006/relationships" id="256" r:id="R328e9780a1ea4a07"/>
-    <p:sldId xmlns:r="http://schemas.openxmlformats.org/officeDocument/2006/relationships" id="257" r:id="R939e25925a4a49b8"/>
-    <p:sldId xmlns:r="http://schemas.openxmlformats.org/officeDocument/2006/relationships" id="258" r:id="R99a990fd929648ef"/>
-    <p:sldId xmlns:r="http://schemas.openxmlformats.org/officeDocument/2006/relationships" id="259" r:id="Re1694c5511b84b2f"/>
-    <p:sldId xmlns:r="http://schemas.openxmlformats.org/officeDocument/2006/relationships" id="260" r:id="Rdf758fc3c29b425c"/>
-    <p:sldId xmlns:r="http://schemas.openxmlformats.org/officeDocument/2006/relationships" id="261" r:id="R8fd168410ab8466b"/>
-    <p:sldId xmlns:r="http://schemas.openxmlformats.org/officeDocument/2006/relationships" id="262" r:id="R5814ff0ad5614108"/>
-    <p:sldId xmlns:r="http://schemas.openxmlformats.org/officeDocument/2006/relationships" id="263" r:id="R070cfd30c6214008"/>
-    <p:sldId xmlns:r="http://schemas.openxmlformats.org/officeDocument/2006/relationships" id="264" r:id="Rd882fe659dd54497"/>
-    <p:sldId xmlns:r="http://schemas.openxmlformats.org/officeDocument/2006/relationships" id="265" r:id="Ra29b66b505ad4949"/>
-    <p:sldId xmlns:r="http://schemas.openxmlformats.org/officeDocument/2006/relationships" id="266" r:id="Race4b0cce5294e4c"/>
-    <p:sldId xmlns:r="http://schemas.openxmlformats.org/officeDocument/2006/relationships" id="267" r:id="Ra8c6202c9b6342e8"/>
+    <p:sldId xmlns:r="http://schemas.openxmlformats.org/officeDocument/2006/relationships" id="256" r:id="R116029d240234328"/>
+    <p:sldId xmlns:r="http://schemas.openxmlformats.org/officeDocument/2006/relationships" id="257" r:id="R8bf8562e4c944285"/>
+    <p:sldId xmlns:r="http://schemas.openxmlformats.org/officeDocument/2006/relationships" id="258" r:id="Re19006ee79ab4272"/>
+    <p:sldId xmlns:r="http://schemas.openxmlformats.org/officeDocument/2006/relationships" id="259" r:id="R94f12416ac10486f"/>
+    <p:sldId xmlns:r="http://schemas.openxmlformats.org/officeDocument/2006/relationships" id="260" r:id="R7691544beb7f4f05"/>
+    <p:sldId xmlns:r="http://schemas.openxmlformats.org/officeDocument/2006/relationships" id="261" r:id="Re5e4961b501d4d7e"/>
+    <p:sldId xmlns:r="http://schemas.openxmlformats.org/officeDocument/2006/relationships" id="262" r:id="Rd1bbb94bd3a3425d"/>
+    <p:sldId xmlns:r="http://schemas.openxmlformats.org/officeDocument/2006/relationships" id="263" r:id="Rade4856155ed467e"/>
+    <p:sldId xmlns:r="http://schemas.openxmlformats.org/officeDocument/2006/relationships" id="264" r:id="R0910fa5939134272"/>
+    <p:sldId xmlns:r="http://schemas.openxmlformats.org/officeDocument/2006/relationships" id="265" r:id="R0cbb30201c7d4afa"/>
+    <p:sldId xmlns:r="http://schemas.openxmlformats.org/officeDocument/2006/relationships" id="266" r:id="Ra0b1d47fb13a49a8"/>
+    <p:sldId xmlns:r="http://schemas.openxmlformats.org/officeDocument/2006/relationships" id="267" r:id="Rdcd832b20ab848a0"/>
   </p:sldIdLst>
   <p:sldSz cx="12192000" cy="6858000"/>
   <p:notesSz cx="6858000" cy="9144000"/>
@@ -873,7 +873,7 @@
           <a:lstStyle xmlns:a="http://schemas.openxmlformats.org/drawingml/2006/main"/>
           <a:p xmlns:a="http://schemas.openxmlformats.org/drawingml/2006/main">
             <a:r>
-              <a:t>I do. Reveal the question, setup and each calculation stage one click at a time. Pupils watch before copying. Model answer: 3:4 and 12:16.</a:t>
+              <a:t>I do. Reveal the question, then reveal each mathematical change one click at a time. Point to the numbers and operation that changed before moving to the next line. Final answer: 3:4 and 12:16.</a:t>
             </a:r>
           </a:p>
         </p:txBody>
@@ -1291,7 +1291,7 @@
   </p:cSld>
   <p:clrMap bg1="lt1" tx1="dk1" bg2="lt2" tx2="dk2" accent1="accent1" accent2="accent2" accent3="accent3" accent4="accent4" accent5="accent5" accent6="accent6" hlink="hlink" folHlink="folHlink"/>
   <p:sldLayoutIdLst>
-    <p:sldLayoutId xmlns:r="http://schemas.openxmlformats.org/officeDocument/2006/relationships" id="2147483649" r:id="Rfbcf8b4fc45c445a"/>
+    <p:sldLayoutId xmlns:r="http://schemas.openxmlformats.org/officeDocument/2006/relationships" id="2147483649" r:id="R0d47f6ce1f694e66"/>
   </p:sldLayoutIdLst>
   <p:txStyles>
     <p:titleStyle>
@@ -1842,7 +1842,7 @@
           <p:cNvPr id="12" name="">
             <a:extLst xmlns:a="http://schemas.openxmlformats.org/drawingml/2006/main">
               <a:ext uri="{FF2B5EF4-FFF2-40B4-BE49-F238E27FC236}">
-                <a16:creationId xmlns:a16="http://schemas.microsoft.com/office/drawing/2014/main" id="{E56AFCFF-FF49-4BA2-95A6-BF280A5FF2ED}"/>
+                <a16:creationId xmlns:a16="http://schemas.microsoft.com/office/drawing/2014/main" id="{E2ACEF9C-94BD-43EC-A910-A2159A6602F5}"/>
               </a:ext>
             </a:extLst>
           </p:cNvPr>
@@ -1874,7 +1874,7 @@
           <p:cNvPr id="2" name="">
             <a:extLst xmlns:a="http://schemas.openxmlformats.org/drawingml/2006/main">
               <a:ext uri="{FF2B5EF4-FFF2-40B4-BE49-F238E27FC236}">
-                <a16:creationId xmlns:a16="http://schemas.microsoft.com/office/drawing/2014/main" id="{48A4D030-D494-4152-831F-7FCD7265F84D}"/>
+                <a16:creationId xmlns:a16="http://schemas.microsoft.com/office/drawing/2014/main" id="{401EB8A0-B251-49A2-A09D-AF8CAA007358}"/>
               </a:ext>
             </a:extLst>
           </p:cNvPr>
@@ -1931,7 +1931,7 @@
           <p:cNvPr id="3" name="">
             <a:extLst xmlns:a="http://schemas.openxmlformats.org/drawingml/2006/main">
               <a:ext uri="{FF2B5EF4-FFF2-40B4-BE49-F238E27FC236}">
-                <a16:creationId xmlns:a16="http://schemas.microsoft.com/office/drawing/2014/main" id="{CDBE9BF1-E420-43D0-9FAE-244C87FC9EB6}"/>
+                <a16:creationId xmlns:a16="http://schemas.microsoft.com/office/drawing/2014/main" id="{512E129D-5C12-4C9E-8D1A-2F7A9654D448}"/>
               </a:ext>
             </a:extLst>
           </p:cNvPr>
@@ -1965,7 +1965,7 @@
           <p:cNvPr id="4" name="">
             <a:extLst xmlns:a="http://schemas.openxmlformats.org/drawingml/2006/main">
               <a:ext uri="{FF2B5EF4-FFF2-40B4-BE49-F238E27FC236}">
-                <a16:creationId xmlns:a16="http://schemas.microsoft.com/office/drawing/2014/main" id="{29CB6FC2-5080-4565-98C2-FADB789EE3FA}"/>
+                <a16:creationId xmlns:a16="http://schemas.microsoft.com/office/drawing/2014/main" id="{B941BE6C-147B-401B-BFAB-2EDB96244170}"/>
               </a:ext>
             </a:extLst>
           </p:cNvPr>
@@ -2022,7 +2022,7 @@
           <p:cNvPr id="5" name="">
             <a:extLst xmlns:a="http://schemas.openxmlformats.org/drawingml/2006/main">
               <a:ext uri="{FF2B5EF4-FFF2-40B4-BE49-F238E27FC236}">
-                <a16:creationId xmlns:a16="http://schemas.microsoft.com/office/drawing/2014/main" id="{2EEC532A-51A6-4EF4-8609-2F442409B91C}"/>
+                <a16:creationId xmlns:a16="http://schemas.microsoft.com/office/drawing/2014/main" id="{C59847E8-EDE2-4E75-A608-0F4B9A686D1C}"/>
               </a:ext>
             </a:extLst>
           </p:cNvPr>
@@ -2079,7 +2079,7 @@
           <p:cNvPr id="6" name="">
             <a:extLst xmlns:a="http://schemas.openxmlformats.org/drawingml/2006/main">
               <a:ext uri="{FF2B5EF4-FFF2-40B4-BE49-F238E27FC236}">
-                <a16:creationId xmlns:a16="http://schemas.microsoft.com/office/drawing/2014/main" id="{926A0EAD-857A-4605-8BAA-9C57FFA553E6}"/>
+                <a16:creationId xmlns:a16="http://schemas.microsoft.com/office/drawing/2014/main" id="{9709D940-AF7A-4F98-A2A3-FEB533E5A953}"/>
               </a:ext>
             </a:extLst>
           </p:cNvPr>
@@ -2113,7 +2113,7 @@
           <p:cNvPr id="7" name="">
             <a:extLst xmlns:a="http://schemas.openxmlformats.org/drawingml/2006/main">
               <a:ext uri="{FF2B5EF4-FFF2-40B4-BE49-F238E27FC236}">
-                <a16:creationId xmlns:a16="http://schemas.microsoft.com/office/drawing/2014/main" id="{983EEB3A-5A12-4D41-8BE8-F5595CED086F}"/>
+                <a16:creationId xmlns:a16="http://schemas.microsoft.com/office/drawing/2014/main" id="{6091CFA6-4C27-4401-80CD-E283CCF467EB}"/>
               </a:ext>
             </a:extLst>
           </p:cNvPr>
@@ -2170,7 +2170,7 @@
           <p:cNvPr id="8" name="">
             <a:extLst xmlns:a="http://schemas.openxmlformats.org/drawingml/2006/main">
               <a:ext uri="{FF2B5EF4-FFF2-40B4-BE49-F238E27FC236}">
-                <a16:creationId xmlns:a16="http://schemas.microsoft.com/office/drawing/2014/main" id="{A9E7BC18-1E59-421E-AAC7-EF9CDA77C8F9}"/>
+                <a16:creationId xmlns:a16="http://schemas.microsoft.com/office/drawing/2014/main" id="{76F4B125-5ABD-438F-AF25-9C64455812C4}"/>
               </a:ext>
             </a:extLst>
           </p:cNvPr>
@@ -2227,7 +2227,7 @@
           <p:cNvPr id="9" name="">
             <a:extLst xmlns:a="http://schemas.openxmlformats.org/drawingml/2006/main">
               <a:ext uri="{FF2B5EF4-FFF2-40B4-BE49-F238E27FC236}">
-                <a16:creationId xmlns:a16="http://schemas.microsoft.com/office/drawing/2014/main" id="{E7D4FBB6-A657-4557-AD8C-EDC2E910BFC7}"/>
+                <a16:creationId xmlns:a16="http://schemas.microsoft.com/office/drawing/2014/main" id="{8D229E46-D1A2-4F18-899D-4495D86E900A}"/>
               </a:ext>
             </a:extLst>
           </p:cNvPr>
@@ -2284,7 +2284,7 @@
           <p:cNvPr id="10" name="">
             <a:extLst xmlns:a="http://schemas.openxmlformats.org/drawingml/2006/main">
               <a:ext uri="{FF2B5EF4-FFF2-40B4-BE49-F238E27FC236}">
-                <a16:creationId xmlns:a16="http://schemas.microsoft.com/office/drawing/2014/main" id="{9779DF37-6676-45E6-AC7F-7E93F1E534D8}"/>
+                <a16:creationId xmlns:a16="http://schemas.microsoft.com/office/drawing/2014/main" id="{9FE1CE05-E520-4568-BF29-0A4AD406B40D}"/>
               </a:ext>
             </a:extLst>
           </p:cNvPr>
@@ -2341,7 +2341,7 @@
           <p:cNvPr id="11" name="">
             <a:extLst xmlns:a="http://schemas.openxmlformats.org/drawingml/2006/main">
               <a:ext uri="{FF2B5EF4-FFF2-40B4-BE49-F238E27FC236}">
-                <a16:creationId xmlns:a16="http://schemas.microsoft.com/office/drawing/2014/main" id="{9C8E4DE2-7ADD-42B2-9F2E-992FEFDF47AC}"/>
+                <a16:creationId xmlns:a16="http://schemas.microsoft.com/office/drawing/2014/main" id="{01786430-3E0C-4DD6-BFE3-2ABEB8C36625}"/>
               </a:ext>
             </a:extLst>
           </p:cNvPr>
@@ -2396,7 +2396,7 @@
     </p:spTree>
     <p:extLst>
       <p:ext uri="{BB962C8B-B14F-4D97-AF65-F5344CB8AC3E}">
-        <p14:creationId xmlns:p14="http://schemas.microsoft.com/office/powerpoint/2010/main" val="352161988"/>
+        <p14:creationId xmlns:p14="http://schemas.microsoft.com/office/powerpoint/2010/main" val="186962952"/>
       </p:ext>
     </p:extLst>
   </p:cSld>
@@ -2427,7 +2427,7 @@
           <p:cNvPr id="14" name="">
             <a:extLst xmlns:a="http://schemas.openxmlformats.org/drawingml/2006/main">
               <a:ext uri="{FF2B5EF4-FFF2-40B4-BE49-F238E27FC236}">
-                <a16:creationId xmlns:a16="http://schemas.microsoft.com/office/drawing/2014/main" id="{D7BDD3AB-ACF0-431F-8D7C-4582389F27C3}"/>
+                <a16:creationId xmlns:a16="http://schemas.microsoft.com/office/drawing/2014/main" id="{D5F769FB-6E22-4DD5-A6E8-65EF4572FEDB}"/>
               </a:ext>
             </a:extLst>
           </p:cNvPr>
@@ -2459,7 +2459,7 @@
           <p:cNvPr id="2" name="">
             <a:extLst xmlns:a="http://schemas.openxmlformats.org/drawingml/2006/main">
               <a:ext uri="{FF2B5EF4-FFF2-40B4-BE49-F238E27FC236}">
-                <a16:creationId xmlns:a16="http://schemas.microsoft.com/office/drawing/2014/main" id="{FDB2187E-2997-4565-922F-37DCBB4BBC98}"/>
+                <a16:creationId xmlns:a16="http://schemas.microsoft.com/office/drawing/2014/main" id="{B542A912-6E77-4D76-B993-D76779E48D2C}"/>
               </a:ext>
             </a:extLst>
           </p:cNvPr>
@@ -2516,7 +2516,7 @@
           <p:cNvPr id="3" name="">
             <a:extLst xmlns:a="http://schemas.openxmlformats.org/drawingml/2006/main">
               <a:ext uri="{FF2B5EF4-FFF2-40B4-BE49-F238E27FC236}">
-                <a16:creationId xmlns:a16="http://schemas.microsoft.com/office/drawing/2014/main" id="{57CFC08A-CD79-4EEC-86FB-1BD184896517}"/>
+                <a16:creationId xmlns:a16="http://schemas.microsoft.com/office/drawing/2014/main" id="{B730D403-C0E3-4EF9-A7E1-F42C0CB55736}"/>
               </a:ext>
             </a:extLst>
           </p:cNvPr>
@@ -2548,7 +2548,7 @@
           <p:cNvPr id="4" name="">
             <a:extLst xmlns:a="http://schemas.openxmlformats.org/drawingml/2006/main">
               <a:ext uri="{FF2B5EF4-FFF2-40B4-BE49-F238E27FC236}">
-                <a16:creationId xmlns:a16="http://schemas.microsoft.com/office/drawing/2014/main" id="{3D694B20-5BFF-4EAC-8D3E-85EFA68BE9D2}"/>
+                <a16:creationId xmlns:a16="http://schemas.microsoft.com/office/drawing/2014/main" id="{AA8C6F06-589D-41B7-A031-D13E3811BDB9}"/>
               </a:ext>
             </a:extLst>
           </p:cNvPr>
@@ -2605,7 +2605,7 @@
           <p:cNvPr id="5" name="">
             <a:extLst xmlns:a="http://schemas.openxmlformats.org/drawingml/2006/main">
               <a:ext uri="{FF2B5EF4-FFF2-40B4-BE49-F238E27FC236}">
-                <a16:creationId xmlns:a16="http://schemas.microsoft.com/office/drawing/2014/main" id="{79D43DDC-4C82-4967-A2DB-82A397BA2385}"/>
+                <a16:creationId xmlns:a16="http://schemas.microsoft.com/office/drawing/2014/main" id="{1A9822D1-3F49-4E39-98A5-C7BE4A96F638}"/>
               </a:ext>
             </a:extLst>
           </p:cNvPr>
@@ -2662,7 +2662,7 @@
           <p:cNvPr id="6" name="">
             <a:extLst xmlns:a="http://schemas.openxmlformats.org/drawingml/2006/main">
               <a:ext uri="{FF2B5EF4-FFF2-40B4-BE49-F238E27FC236}">
-                <a16:creationId xmlns:a16="http://schemas.microsoft.com/office/drawing/2014/main" id="{8A808893-3337-4013-B094-EC0731D89DFD}"/>
+                <a16:creationId xmlns:a16="http://schemas.microsoft.com/office/drawing/2014/main" id="{D2BAB40A-4FD6-4A4A-ABA9-65CCEEFBA9A3}"/>
               </a:ext>
             </a:extLst>
           </p:cNvPr>
@@ -2719,7 +2719,7 @@
           <p:cNvPr id="7" name="">
             <a:extLst xmlns:a="http://schemas.openxmlformats.org/drawingml/2006/main">
               <a:ext uri="{FF2B5EF4-FFF2-40B4-BE49-F238E27FC236}">
-                <a16:creationId xmlns:a16="http://schemas.microsoft.com/office/drawing/2014/main" id="{8AEE7B8D-1B04-4CE3-BEA8-0AF4EF2AB914}"/>
+                <a16:creationId xmlns:a16="http://schemas.microsoft.com/office/drawing/2014/main" id="{3130967F-4A00-4DC7-9C50-B59A13A3BA74}"/>
               </a:ext>
             </a:extLst>
           </p:cNvPr>
@@ -2751,7 +2751,7 @@
           <p:cNvPr id="8" name="">
             <a:extLst xmlns:a="http://schemas.openxmlformats.org/drawingml/2006/main">
               <a:ext uri="{FF2B5EF4-FFF2-40B4-BE49-F238E27FC236}">
-                <a16:creationId xmlns:a16="http://schemas.microsoft.com/office/drawing/2014/main" id="{9AE5A632-5D7B-45F1-A0DB-42BCF40A8325}"/>
+                <a16:creationId xmlns:a16="http://schemas.microsoft.com/office/drawing/2014/main" id="{1BBB4779-7638-43AA-9AF2-D880FDC32C6C}"/>
               </a:ext>
             </a:extLst>
           </p:cNvPr>
@@ -2808,7 +2808,7 @@
           <p:cNvPr id="9" name="">
             <a:extLst xmlns:a="http://schemas.openxmlformats.org/drawingml/2006/main">
               <a:ext uri="{FF2B5EF4-FFF2-40B4-BE49-F238E27FC236}">
-                <a16:creationId xmlns:a16="http://schemas.microsoft.com/office/drawing/2014/main" id="{85DAB058-75E4-4246-9F93-FD4C7AD43F2F}"/>
+                <a16:creationId xmlns:a16="http://schemas.microsoft.com/office/drawing/2014/main" id="{D7B10DEF-4F87-4A20-AD9B-A1AE9534CD62}"/>
               </a:ext>
             </a:extLst>
           </p:cNvPr>
@@ -2865,7 +2865,7 @@
           <p:cNvPr id="10" name="">
             <a:extLst xmlns:a="http://schemas.openxmlformats.org/drawingml/2006/main">
               <a:ext uri="{FF2B5EF4-FFF2-40B4-BE49-F238E27FC236}">
-                <a16:creationId xmlns:a16="http://schemas.microsoft.com/office/drawing/2014/main" id="{AF3138ED-0ED7-4830-89C4-4EFD51396FF9}"/>
+                <a16:creationId xmlns:a16="http://schemas.microsoft.com/office/drawing/2014/main" id="{89837CE7-3292-4860-B983-F09838982A66}"/>
               </a:ext>
             </a:extLst>
           </p:cNvPr>
@@ -2922,7 +2922,7 @@
           <p:cNvPr id="11" name="">
             <a:extLst xmlns:a="http://schemas.openxmlformats.org/drawingml/2006/main">
               <a:ext uri="{FF2B5EF4-FFF2-40B4-BE49-F238E27FC236}">
-                <a16:creationId xmlns:a16="http://schemas.microsoft.com/office/drawing/2014/main" id="{F7AD56F3-DFBD-4B0E-A406-E098AD61D28F}"/>
+                <a16:creationId xmlns:a16="http://schemas.microsoft.com/office/drawing/2014/main" id="{398956BF-F2EE-40A8-A359-201347BBEF1B}"/>
               </a:ext>
             </a:extLst>
           </p:cNvPr>
@@ -2979,7 +2979,7 @@
           <p:cNvPr id="12" name="">
             <a:extLst xmlns:a="http://schemas.openxmlformats.org/drawingml/2006/main">
               <a:ext uri="{FF2B5EF4-FFF2-40B4-BE49-F238E27FC236}">
-                <a16:creationId xmlns:a16="http://schemas.microsoft.com/office/drawing/2014/main" id="{6C573BF3-C241-469A-A139-244CED9AB7E5}"/>
+                <a16:creationId xmlns:a16="http://schemas.microsoft.com/office/drawing/2014/main" id="{87F72D57-0515-4234-8BE5-83FD127D3BAE}"/>
               </a:ext>
             </a:extLst>
           </p:cNvPr>
@@ -3036,7 +3036,7 @@
           <p:cNvPr id="13" name="">
             <a:extLst xmlns:a="http://schemas.openxmlformats.org/drawingml/2006/main">
               <a:ext uri="{FF2B5EF4-FFF2-40B4-BE49-F238E27FC236}">
-                <a16:creationId xmlns:a16="http://schemas.microsoft.com/office/drawing/2014/main" id="{D1A2D642-1299-4BDF-8B6F-C56CFD342B1E}"/>
+                <a16:creationId xmlns:a16="http://schemas.microsoft.com/office/drawing/2014/main" id="{432632AD-DC25-418D-BD1D-1D97B97E3696}"/>
               </a:ext>
             </a:extLst>
           </p:cNvPr>
@@ -3091,7 +3091,7 @@
     </p:spTree>
     <p:extLst>
       <p:ext uri="{BB962C8B-B14F-4D97-AF65-F5344CB8AC3E}">
-        <p14:creationId xmlns:p14="http://schemas.microsoft.com/office/powerpoint/2010/main" val="830822951"/>
+        <p14:creationId xmlns:p14="http://schemas.microsoft.com/office/powerpoint/2010/main" val="518598821"/>
       </p:ext>
     </p:extLst>
   </p:cSld>
@@ -3292,7 +3292,7 @@
           <p:cNvPr id="19" name="">
             <a:extLst xmlns:a="http://schemas.openxmlformats.org/drawingml/2006/main">
               <a:ext uri="{FF2B5EF4-FFF2-40B4-BE49-F238E27FC236}">
-                <a16:creationId xmlns:a16="http://schemas.microsoft.com/office/drawing/2014/main" id="{2ABE7353-ADF2-4CB7-81B5-89D9AAB28B9E}"/>
+                <a16:creationId xmlns:a16="http://schemas.microsoft.com/office/drawing/2014/main" id="{39B0C4C0-0E59-4C4E-964D-E4423215BE92}"/>
               </a:ext>
             </a:extLst>
           </p:cNvPr>
@@ -3324,7 +3324,7 @@
           <p:cNvPr id="2" name="">
             <a:extLst xmlns:a="http://schemas.openxmlformats.org/drawingml/2006/main">
               <a:ext uri="{FF2B5EF4-FFF2-40B4-BE49-F238E27FC236}">
-                <a16:creationId xmlns:a16="http://schemas.microsoft.com/office/drawing/2014/main" id="{D1C6E02D-C623-4031-9A5C-409362C008C0}"/>
+                <a16:creationId xmlns:a16="http://schemas.microsoft.com/office/drawing/2014/main" id="{58C3EF5E-3A05-40C8-A9E1-65E52D29B46F}"/>
               </a:ext>
             </a:extLst>
           </p:cNvPr>
@@ -3381,7 +3381,7 @@
           <p:cNvPr id="3" name="">
             <a:extLst xmlns:a="http://schemas.openxmlformats.org/drawingml/2006/main">
               <a:ext uri="{FF2B5EF4-FFF2-40B4-BE49-F238E27FC236}">
-                <a16:creationId xmlns:a16="http://schemas.microsoft.com/office/drawing/2014/main" id="{CBB12755-60D1-4E19-B4A6-ECC8E612D2C9}"/>
+                <a16:creationId xmlns:a16="http://schemas.microsoft.com/office/drawing/2014/main" id="{E18ECF26-CF8B-4F79-9A15-5D9F9C8D7888}"/>
               </a:ext>
             </a:extLst>
           </p:cNvPr>
@@ -3413,7 +3413,7 @@
           <p:cNvPr id="4" name="">
             <a:extLst xmlns:a="http://schemas.openxmlformats.org/drawingml/2006/main">
               <a:ext uri="{FF2B5EF4-FFF2-40B4-BE49-F238E27FC236}">
-                <a16:creationId xmlns:a16="http://schemas.microsoft.com/office/drawing/2014/main" id="{42660AEA-DBB6-4F40-9502-A92F684BFFED}"/>
+                <a16:creationId xmlns:a16="http://schemas.microsoft.com/office/drawing/2014/main" id="{70CCEA61-EAE4-4FBA-B70A-55096D75EB34}"/>
               </a:ext>
             </a:extLst>
           </p:cNvPr>
@@ -3470,7 +3470,7 @@
           <p:cNvPr id="5" name="">
             <a:extLst xmlns:a="http://schemas.openxmlformats.org/drawingml/2006/main">
               <a:ext uri="{FF2B5EF4-FFF2-40B4-BE49-F238E27FC236}">
-                <a16:creationId xmlns:a16="http://schemas.microsoft.com/office/drawing/2014/main" id="{B0E4F7A2-D2BD-4F94-8A18-23BED0FBB78A}"/>
+                <a16:creationId xmlns:a16="http://schemas.microsoft.com/office/drawing/2014/main" id="{0F25FA53-6C0F-48EB-B0EB-5F83852942A2}"/>
               </a:ext>
             </a:extLst>
           </p:cNvPr>
@@ -3527,7 +3527,7 @@
           <p:cNvPr id="6" name="">
             <a:extLst xmlns:a="http://schemas.openxmlformats.org/drawingml/2006/main">
               <a:ext uri="{FF2B5EF4-FFF2-40B4-BE49-F238E27FC236}">
-                <a16:creationId xmlns:a16="http://schemas.microsoft.com/office/drawing/2014/main" id="{2EF5F246-39FF-4927-9575-089555768079}"/>
+                <a16:creationId xmlns:a16="http://schemas.microsoft.com/office/drawing/2014/main" id="{BB720904-F8AA-4E9C-8E33-A490C9FAE348}"/>
               </a:ext>
             </a:extLst>
           </p:cNvPr>
@@ -3584,7 +3584,7 @@
           <p:cNvPr id="7" name="">
             <a:extLst xmlns:a="http://schemas.openxmlformats.org/drawingml/2006/main">
               <a:ext uri="{FF2B5EF4-FFF2-40B4-BE49-F238E27FC236}">
-                <a16:creationId xmlns:a16="http://schemas.microsoft.com/office/drawing/2014/main" id="{157D50B4-EA11-40B3-AB94-AD54A93C27EF}"/>
+                <a16:creationId xmlns:a16="http://schemas.microsoft.com/office/drawing/2014/main" id="{F744F78A-CD1E-490D-9009-F081010F264C}"/>
               </a:ext>
             </a:extLst>
           </p:cNvPr>
@@ -3616,7 +3616,7 @@
           <p:cNvPr id="8" name="">
             <a:extLst xmlns:a="http://schemas.openxmlformats.org/drawingml/2006/main">
               <a:ext uri="{FF2B5EF4-FFF2-40B4-BE49-F238E27FC236}">
-                <a16:creationId xmlns:a16="http://schemas.microsoft.com/office/drawing/2014/main" id="{44B19526-D2ED-4A23-8C50-8B51577EFBBE}"/>
+                <a16:creationId xmlns:a16="http://schemas.microsoft.com/office/drawing/2014/main" id="{5DFD11A9-3527-456E-9452-4EE92F99D154}"/>
               </a:ext>
             </a:extLst>
           </p:cNvPr>
@@ -3673,7 +3673,7 @@
           <p:cNvPr id="9" name="">
             <a:extLst xmlns:a="http://schemas.openxmlformats.org/drawingml/2006/main">
               <a:ext uri="{FF2B5EF4-FFF2-40B4-BE49-F238E27FC236}">
-                <a16:creationId xmlns:a16="http://schemas.microsoft.com/office/drawing/2014/main" id="{BF7938BC-DB3A-47B8-B21A-53DDCB37248E}"/>
+                <a16:creationId xmlns:a16="http://schemas.microsoft.com/office/drawing/2014/main" id="{11250057-3FFE-41C7-A7DF-1A07349CE723}"/>
               </a:ext>
             </a:extLst>
           </p:cNvPr>
@@ -3730,7 +3730,7 @@
           <p:cNvPr id="10" name="">
             <a:extLst xmlns:a="http://schemas.openxmlformats.org/drawingml/2006/main">
               <a:ext uri="{FF2B5EF4-FFF2-40B4-BE49-F238E27FC236}">
-                <a16:creationId xmlns:a16="http://schemas.microsoft.com/office/drawing/2014/main" id="{EFD4B5FA-943B-458A-90C4-562DE913239E}"/>
+                <a16:creationId xmlns:a16="http://schemas.microsoft.com/office/drawing/2014/main" id="{021F3384-A399-4E7C-BA8F-A2F3AF8D2BF1}"/>
               </a:ext>
             </a:extLst>
           </p:cNvPr>
@@ -3787,7 +3787,7 @@
           <p:cNvPr id="11" name="">
             <a:extLst xmlns:a="http://schemas.openxmlformats.org/drawingml/2006/main">
               <a:ext uri="{FF2B5EF4-FFF2-40B4-BE49-F238E27FC236}">
-                <a16:creationId xmlns:a16="http://schemas.microsoft.com/office/drawing/2014/main" id="{3571F35F-ADCB-47AB-A778-BED3F977F0BE}"/>
+                <a16:creationId xmlns:a16="http://schemas.microsoft.com/office/drawing/2014/main" id="{5A2F4E53-C5DF-4C0A-BB75-181330E11CF7}"/>
               </a:ext>
             </a:extLst>
           </p:cNvPr>
@@ -3821,7 +3821,7 @@
           <p:cNvPr id="12" name="">
             <a:extLst xmlns:a="http://schemas.openxmlformats.org/drawingml/2006/main">
               <a:ext uri="{FF2B5EF4-FFF2-40B4-BE49-F238E27FC236}">
-                <a16:creationId xmlns:a16="http://schemas.microsoft.com/office/drawing/2014/main" id="{077BE582-8CD3-4378-9DB6-17A7369F6DAA}"/>
+                <a16:creationId xmlns:a16="http://schemas.microsoft.com/office/drawing/2014/main" id="{035F22F3-5A1D-4D08-85DD-8246C05B13DC}"/>
               </a:ext>
             </a:extLst>
           </p:cNvPr>
@@ -3878,7 +3878,7 @@
           <p:cNvPr id="13" name="">
             <a:extLst xmlns:a="http://schemas.openxmlformats.org/drawingml/2006/main">
               <a:ext uri="{FF2B5EF4-FFF2-40B4-BE49-F238E27FC236}">
-                <a16:creationId xmlns:a16="http://schemas.microsoft.com/office/drawing/2014/main" id="{19AF86EF-9766-4BC9-BE20-A1FE08C26000}"/>
+                <a16:creationId xmlns:a16="http://schemas.microsoft.com/office/drawing/2014/main" id="{BE88FA95-F638-4EBA-8AAA-A955640CCAF5}"/>
               </a:ext>
             </a:extLst>
           </p:cNvPr>
@@ -3935,7 +3935,7 @@
           <p:cNvPr id="14" name="">
             <a:extLst xmlns:a="http://schemas.openxmlformats.org/drawingml/2006/main">
               <a:ext uri="{FF2B5EF4-FFF2-40B4-BE49-F238E27FC236}">
-                <a16:creationId xmlns:a16="http://schemas.microsoft.com/office/drawing/2014/main" id="{F7A7E854-CD1C-457D-B567-0994679F259B}"/>
+                <a16:creationId xmlns:a16="http://schemas.microsoft.com/office/drawing/2014/main" id="{D6492339-C35E-4BE9-BDB7-C1F4F6B974D0}"/>
               </a:ext>
             </a:extLst>
           </p:cNvPr>
@@ -3992,7 +3992,7 @@
           <p:cNvPr id="15" name="">
             <a:extLst xmlns:a="http://schemas.openxmlformats.org/drawingml/2006/main">
               <a:ext uri="{FF2B5EF4-FFF2-40B4-BE49-F238E27FC236}">
-                <a16:creationId xmlns:a16="http://schemas.microsoft.com/office/drawing/2014/main" id="{A5006629-0621-4A62-A0DB-6D2B4063C001}"/>
+                <a16:creationId xmlns:a16="http://schemas.microsoft.com/office/drawing/2014/main" id="{B906CDD9-7ED7-4FD4-93E3-D73F13188C49}"/>
               </a:ext>
             </a:extLst>
           </p:cNvPr>
@@ -4026,7 +4026,7 @@
           <p:cNvPr id="16" name="">
             <a:extLst xmlns:a="http://schemas.openxmlformats.org/drawingml/2006/main">
               <a:ext uri="{FF2B5EF4-FFF2-40B4-BE49-F238E27FC236}">
-                <a16:creationId xmlns:a16="http://schemas.microsoft.com/office/drawing/2014/main" id="{7BA57051-127D-493D-855E-F354A2B8AFD7}"/>
+                <a16:creationId xmlns:a16="http://schemas.microsoft.com/office/drawing/2014/main" id="{3A4A281B-D8A2-47F1-A047-CC18FB47496F}"/>
               </a:ext>
             </a:extLst>
           </p:cNvPr>
@@ -4083,7 +4083,7 @@
           <p:cNvPr id="17" name="">
             <a:extLst xmlns:a="http://schemas.openxmlformats.org/drawingml/2006/main">
               <a:ext uri="{FF2B5EF4-FFF2-40B4-BE49-F238E27FC236}">
-                <a16:creationId xmlns:a16="http://schemas.microsoft.com/office/drawing/2014/main" id="{21563100-5568-4339-8F5F-F6A1714EF6A1}"/>
+                <a16:creationId xmlns:a16="http://schemas.microsoft.com/office/drawing/2014/main" id="{DE0312F6-E7AC-4A8E-8774-B52C9A49F1EC}"/>
               </a:ext>
             </a:extLst>
           </p:cNvPr>
@@ -4140,7 +4140,7 @@
           <p:cNvPr id="18" name="">
             <a:extLst xmlns:a="http://schemas.openxmlformats.org/drawingml/2006/main">
               <a:ext uri="{FF2B5EF4-FFF2-40B4-BE49-F238E27FC236}">
-                <a16:creationId xmlns:a16="http://schemas.microsoft.com/office/drawing/2014/main" id="{F42303A9-299D-4255-BEC4-E61C8BE4479D}"/>
+                <a16:creationId xmlns:a16="http://schemas.microsoft.com/office/drawing/2014/main" id="{55C390A9-9E52-467F-BAF5-52428F6EF519}"/>
               </a:ext>
             </a:extLst>
           </p:cNvPr>
@@ -4195,7 +4195,7 @@
     </p:spTree>
     <p:extLst>
       <p:ext uri="{BB962C8B-B14F-4D97-AF65-F5344CB8AC3E}">
-        <p14:creationId xmlns:p14="http://schemas.microsoft.com/office/powerpoint/2010/main" val="946236011"/>
+        <p14:creationId xmlns:p14="http://schemas.microsoft.com/office/powerpoint/2010/main" val="1681011029"/>
       </p:ext>
     </p:extLst>
   </p:cSld>
@@ -4350,7 +4350,7 @@
           <p:cNvPr id="23" name="">
             <a:extLst xmlns:a="http://schemas.openxmlformats.org/drawingml/2006/main">
               <a:ext uri="{FF2B5EF4-FFF2-40B4-BE49-F238E27FC236}">
-                <a16:creationId xmlns:a16="http://schemas.microsoft.com/office/drawing/2014/main" id="{2E6AB373-C045-46B9-85E1-DBFDE41FBB0E}"/>
+                <a16:creationId xmlns:a16="http://schemas.microsoft.com/office/drawing/2014/main" id="{0B6EFD6F-CBBA-4A38-BF5C-A51061852E0B}"/>
               </a:ext>
             </a:extLst>
           </p:cNvPr>
@@ -4382,7 +4382,7 @@
           <p:cNvPr id="2" name="">
             <a:extLst xmlns:a="http://schemas.openxmlformats.org/drawingml/2006/main">
               <a:ext uri="{FF2B5EF4-FFF2-40B4-BE49-F238E27FC236}">
-                <a16:creationId xmlns:a16="http://schemas.microsoft.com/office/drawing/2014/main" id="{3E37EC27-2E83-422D-8033-129872005F42}"/>
+                <a16:creationId xmlns:a16="http://schemas.microsoft.com/office/drawing/2014/main" id="{66B25222-B848-4C23-95C5-054C78D9345C}"/>
               </a:ext>
             </a:extLst>
           </p:cNvPr>
@@ -4439,7 +4439,7 @@
           <p:cNvPr id="3" name="">
             <a:extLst xmlns:a="http://schemas.openxmlformats.org/drawingml/2006/main">
               <a:ext uri="{FF2B5EF4-FFF2-40B4-BE49-F238E27FC236}">
-                <a16:creationId xmlns:a16="http://schemas.microsoft.com/office/drawing/2014/main" id="{E7EA4AD4-63DF-4447-A06A-9BAF26F709BA}"/>
+                <a16:creationId xmlns:a16="http://schemas.microsoft.com/office/drawing/2014/main" id="{02CA1BC9-EBF0-4D0F-9D40-1F08DEC35D5C}"/>
               </a:ext>
             </a:extLst>
           </p:cNvPr>
@@ -4471,7 +4471,7 @@
           <p:cNvPr id="4" name="">
             <a:extLst xmlns:a="http://schemas.openxmlformats.org/drawingml/2006/main">
               <a:ext uri="{FF2B5EF4-FFF2-40B4-BE49-F238E27FC236}">
-                <a16:creationId xmlns:a16="http://schemas.microsoft.com/office/drawing/2014/main" id="{051898A7-C33E-4032-A7B2-FBE446F022ED}"/>
+                <a16:creationId xmlns:a16="http://schemas.microsoft.com/office/drawing/2014/main" id="{1245CD31-A8F8-49BB-A091-04927EC2416B}"/>
               </a:ext>
             </a:extLst>
           </p:cNvPr>
@@ -4528,7 +4528,7 @@
           <p:cNvPr id="5" name="">
             <a:extLst xmlns:a="http://schemas.openxmlformats.org/drawingml/2006/main">
               <a:ext uri="{FF2B5EF4-FFF2-40B4-BE49-F238E27FC236}">
-                <a16:creationId xmlns:a16="http://schemas.microsoft.com/office/drawing/2014/main" id="{B39C87E2-3E16-465D-9EE9-D8A4FFB327B9}"/>
+                <a16:creationId xmlns:a16="http://schemas.microsoft.com/office/drawing/2014/main" id="{F6DC6E2D-553D-4115-A99E-5F5F6AE8319F}"/>
               </a:ext>
             </a:extLst>
           </p:cNvPr>
@@ -4585,7 +4585,7 @@
           <p:cNvPr id="6" name="">
             <a:extLst xmlns:a="http://schemas.openxmlformats.org/drawingml/2006/main">
               <a:ext uri="{FF2B5EF4-FFF2-40B4-BE49-F238E27FC236}">
-                <a16:creationId xmlns:a16="http://schemas.microsoft.com/office/drawing/2014/main" id="{0E220A4E-ABA3-44FC-A899-26F272537DC2}"/>
+                <a16:creationId xmlns:a16="http://schemas.microsoft.com/office/drawing/2014/main" id="{0FA4065B-ED5D-48CA-9F19-EF820A5614DA}"/>
               </a:ext>
             </a:extLst>
           </p:cNvPr>
@@ -4642,7 +4642,7 @@
           <p:cNvPr id="7" name="">
             <a:extLst xmlns:a="http://schemas.openxmlformats.org/drawingml/2006/main">
               <a:ext uri="{FF2B5EF4-FFF2-40B4-BE49-F238E27FC236}">
-                <a16:creationId xmlns:a16="http://schemas.microsoft.com/office/drawing/2014/main" id="{B2A8C1BF-D68E-4FDD-8D38-C97A14B21C71}"/>
+                <a16:creationId xmlns:a16="http://schemas.microsoft.com/office/drawing/2014/main" id="{2565D81F-B46A-4888-8E5C-F78B1865B7C5}"/>
               </a:ext>
             </a:extLst>
           </p:cNvPr>
@@ -4674,7 +4674,7 @@
           <p:cNvPr id="8" name="">
             <a:extLst xmlns:a="http://schemas.openxmlformats.org/drawingml/2006/main">
               <a:ext uri="{FF2B5EF4-FFF2-40B4-BE49-F238E27FC236}">
-                <a16:creationId xmlns:a16="http://schemas.microsoft.com/office/drawing/2014/main" id="{DB4406DA-4601-41F2-BC53-48EA060848B2}"/>
+                <a16:creationId xmlns:a16="http://schemas.microsoft.com/office/drawing/2014/main" id="{F5808C0A-E841-4DCF-8353-8A655E33B640}"/>
               </a:ext>
             </a:extLst>
           </p:cNvPr>
@@ -4731,7 +4731,7 @@
           <p:cNvPr id="9" name="">
             <a:extLst xmlns:a="http://schemas.openxmlformats.org/drawingml/2006/main">
               <a:ext uri="{FF2B5EF4-FFF2-40B4-BE49-F238E27FC236}">
-                <a16:creationId xmlns:a16="http://schemas.microsoft.com/office/drawing/2014/main" id="{253FD3E6-13DF-4184-A538-F48A048BB517}"/>
+                <a16:creationId xmlns:a16="http://schemas.microsoft.com/office/drawing/2014/main" id="{2C40BFF5-7A18-4295-86AE-00D79E12DEC5}"/>
               </a:ext>
             </a:extLst>
           </p:cNvPr>
@@ -4788,7 +4788,7 @@
           <p:cNvPr id="10" name="">
             <a:extLst xmlns:a="http://schemas.openxmlformats.org/drawingml/2006/main">
               <a:ext uri="{FF2B5EF4-FFF2-40B4-BE49-F238E27FC236}">
-                <a16:creationId xmlns:a16="http://schemas.microsoft.com/office/drawing/2014/main" id="{24372382-D951-4432-A7BB-0B93C940A716}"/>
+                <a16:creationId xmlns:a16="http://schemas.microsoft.com/office/drawing/2014/main" id="{0ED37F6C-8BFD-470A-B575-6ED23F0A1C10}"/>
               </a:ext>
             </a:extLst>
           </p:cNvPr>
@@ -4822,7 +4822,7 @@
           <p:cNvPr id="11" name="">
             <a:extLst xmlns:a="http://schemas.openxmlformats.org/drawingml/2006/main">
               <a:ext uri="{FF2B5EF4-FFF2-40B4-BE49-F238E27FC236}">
-                <a16:creationId xmlns:a16="http://schemas.microsoft.com/office/drawing/2014/main" id="{A81ED04F-FC41-42FB-841F-FB67FD0E46D4}"/>
+                <a16:creationId xmlns:a16="http://schemas.microsoft.com/office/drawing/2014/main" id="{E4C3A207-B015-4F2B-AC9A-388A2D86F8CF}"/>
               </a:ext>
             </a:extLst>
           </p:cNvPr>
@@ -4854,7 +4854,7 @@
           <p:cNvPr id="12" name="">
             <a:extLst xmlns:a="http://schemas.openxmlformats.org/drawingml/2006/main">
               <a:ext uri="{FF2B5EF4-FFF2-40B4-BE49-F238E27FC236}">
-                <a16:creationId xmlns:a16="http://schemas.microsoft.com/office/drawing/2014/main" id="{4D6BB865-29EC-4721-B75A-949E74B8F6B4}"/>
+                <a16:creationId xmlns:a16="http://schemas.microsoft.com/office/drawing/2014/main" id="{D4FE0909-5DDF-44E0-8433-A000BB3E09AC}"/>
               </a:ext>
             </a:extLst>
           </p:cNvPr>
@@ -4911,7 +4911,7 @@
           <p:cNvPr id="13" name="">
             <a:extLst xmlns:a="http://schemas.openxmlformats.org/drawingml/2006/main">
               <a:ext uri="{FF2B5EF4-FFF2-40B4-BE49-F238E27FC236}">
-                <a16:creationId xmlns:a16="http://schemas.microsoft.com/office/drawing/2014/main" id="{D282B108-CA5C-4CD8-B106-6B75FCBA75F2}"/>
+                <a16:creationId xmlns:a16="http://schemas.microsoft.com/office/drawing/2014/main" id="{BCA1C902-1BBA-4AF5-ACE0-86091C5BAA85}"/>
               </a:ext>
             </a:extLst>
           </p:cNvPr>
@@ -4968,7 +4968,7 @@
           <p:cNvPr id="14" name="">
             <a:extLst xmlns:a="http://schemas.openxmlformats.org/drawingml/2006/main">
               <a:ext uri="{FF2B5EF4-FFF2-40B4-BE49-F238E27FC236}">
-                <a16:creationId xmlns:a16="http://schemas.microsoft.com/office/drawing/2014/main" id="{0DF3DE38-F3FA-48B0-944C-97206FD6B4D2}"/>
+                <a16:creationId xmlns:a16="http://schemas.microsoft.com/office/drawing/2014/main" id="{5E762D83-A0C5-40E7-A14C-06669053A6C7}"/>
               </a:ext>
             </a:extLst>
           </p:cNvPr>
@@ -5002,7 +5002,7 @@
           <p:cNvPr id="15" name="">
             <a:extLst xmlns:a="http://schemas.openxmlformats.org/drawingml/2006/main">
               <a:ext uri="{FF2B5EF4-FFF2-40B4-BE49-F238E27FC236}">
-                <a16:creationId xmlns:a16="http://schemas.microsoft.com/office/drawing/2014/main" id="{AE6A1B20-39EB-44EF-9C08-F8FFF3CEF88C}"/>
+                <a16:creationId xmlns:a16="http://schemas.microsoft.com/office/drawing/2014/main" id="{35125BE1-CD38-4605-A612-EAAEBBEB9788}"/>
               </a:ext>
             </a:extLst>
           </p:cNvPr>
@@ -5034,7 +5034,7 @@
           <p:cNvPr id="16" name="">
             <a:extLst xmlns:a="http://schemas.openxmlformats.org/drawingml/2006/main">
               <a:ext uri="{FF2B5EF4-FFF2-40B4-BE49-F238E27FC236}">
-                <a16:creationId xmlns:a16="http://schemas.microsoft.com/office/drawing/2014/main" id="{5FB1C54E-0734-456C-B837-2700A927634B}"/>
+                <a16:creationId xmlns:a16="http://schemas.microsoft.com/office/drawing/2014/main" id="{7E85BCEF-1969-4D7C-A658-0D397823EEA3}"/>
               </a:ext>
             </a:extLst>
           </p:cNvPr>
@@ -5091,7 +5091,7 @@
           <p:cNvPr id="17" name="">
             <a:extLst xmlns:a="http://schemas.openxmlformats.org/drawingml/2006/main">
               <a:ext uri="{FF2B5EF4-FFF2-40B4-BE49-F238E27FC236}">
-                <a16:creationId xmlns:a16="http://schemas.microsoft.com/office/drawing/2014/main" id="{4F3A858B-3743-4223-841E-A6DD406FF2EF}"/>
+                <a16:creationId xmlns:a16="http://schemas.microsoft.com/office/drawing/2014/main" id="{51C0C805-61C5-4497-9585-D5B202B9AD55}"/>
               </a:ext>
             </a:extLst>
           </p:cNvPr>
@@ -5148,7 +5148,7 @@
           <p:cNvPr id="18" name="">
             <a:extLst xmlns:a="http://schemas.openxmlformats.org/drawingml/2006/main">
               <a:ext uri="{FF2B5EF4-FFF2-40B4-BE49-F238E27FC236}">
-                <a16:creationId xmlns:a16="http://schemas.microsoft.com/office/drawing/2014/main" id="{62937F4A-0DDC-4FB8-AC99-093305A2F080}"/>
+                <a16:creationId xmlns:a16="http://schemas.microsoft.com/office/drawing/2014/main" id="{22E41296-A294-445C-96D5-84CC0E1F2169}"/>
               </a:ext>
             </a:extLst>
           </p:cNvPr>
@@ -5182,7 +5182,7 @@
           <p:cNvPr id="19" name="">
             <a:extLst xmlns:a="http://schemas.openxmlformats.org/drawingml/2006/main">
               <a:ext uri="{FF2B5EF4-FFF2-40B4-BE49-F238E27FC236}">
-                <a16:creationId xmlns:a16="http://schemas.microsoft.com/office/drawing/2014/main" id="{B6F2B4BC-440F-46A8-ABBA-8B2D9C7EC5E1}"/>
+                <a16:creationId xmlns:a16="http://schemas.microsoft.com/office/drawing/2014/main" id="{8D84E13C-5FF6-4B78-A736-D923085BB7CB}"/>
               </a:ext>
             </a:extLst>
           </p:cNvPr>
@@ -5214,7 +5214,7 @@
           <p:cNvPr id="20" name="">
             <a:extLst xmlns:a="http://schemas.openxmlformats.org/drawingml/2006/main">
               <a:ext uri="{FF2B5EF4-FFF2-40B4-BE49-F238E27FC236}">
-                <a16:creationId xmlns:a16="http://schemas.microsoft.com/office/drawing/2014/main" id="{FFA99D36-BA0A-4CD0-889E-5CB9E1A9CBE2}"/>
+                <a16:creationId xmlns:a16="http://schemas.microsoft.com/office/drawing/2014/main" id="{4A82AB89-C15B-4D5C-B53E-173A380C8C53}"/>
               </a:ext>
             </a:extLst>
           </p:cNvPr>
@@ -5271,7 +5271,7 @@
           <p:cNvPr id="21" name="">
             <a:extLst xmlns:a="http://schemas.openxmlformats.org/drawingml/2006/main">
               <a:ext uri="{FF2B5EF4-FFF2-40B4-BE49-F238E27FC236}">
-                <a16:creationId xmlns:a16="http://schemas.microsoft.com/office/drawing/2014/main" id="{96AF5D33-DAC7-4630-B0A8-15D50B68CDA3}"/>
+                <a16:creationId xmlns:a16="http://schemas.microsoft.com/office/drawing/2014/main" id="{90FBE77D-64A3-47DA-B300-19188706F8F3}"/>
               </a:ext>
             </a:extLst>
           </p:cNvPr>
@@ -5328,7 +5328,7 @@
           <p:cNvPr id="22" name="">
             <a:extLst xmlns:a="http://schemas.openxmlformats.org/drawingml/2006/main">
               <a:ext uri="{FF2B5EF4-FFF2-40B4-BE49-F238E27FC236}">
-                <a16:creationId xmlns:a16="http://schemas.microsoft.com/office/drawing/2014/main" id="{CAB6FCDB-706D-45A2-A6A0-EEE5D532C480}"/>
+                <a16:creationId xmlns:a16="http://schemas.microsoft.com/office/drawing/2014/main" id="{E477D111-17E7-4288-B028-DEDE45712459}"/>
               </a:ext>
             </a:extLst>
           </p:cNvPr>
@@ -5383,7 +5383,7 @@
     </p:spTree>
     <p:extLst>
       <p:ext uri="{BB962C8B-B14F-4D97-AF65-F5344CB8AC3E}">
-        <p14:creationId xmlns:p14="http://schemas.microsoft.com/office/powerpoint/2010/main" val="1740362715"/>
+        <p14:creationId xmlns:p14="http://schemas.microsoft.com/office/powerpoint/2010/main" val="1768085286"/>
       </p:ext>
     </p:extLst>
   </p:cSld>
@@ -5584,7 +5584,7 @@
           <p:cNvPr id="23" name="">
             <a:extLst xmlns:a="http://schemas.openxmlformats.org/drawingml/2006/main">
               <a:ext uri="{FF2B5EF4-FFF2-40B4-BE49-F238E27FC236}">
-                <a16:creationId xmlns:a16="http://schemas.microsoft.com/office/drawing/2014/main" id="{5D603596-B249-44CD-A2AE-38468E64A059}"/>
+                <a16:creationId xmlns:a16="http://schemas.microsoft.com/office/drawing/2014/main" id="{561251EE-670A-42D2-AF37-0A8C70EFEC2F}"/>
               </a:ext>
             </a:extLst>
           </p:cNvPr>
@@ -5616,7 +5616,7 @@
           <p:cNvPr id="2" name="">
             <a:extLst xmlns:a="http://schemas.openxmlformats.org/drawingml/2006/main">
               <a:ext uri="{FF2B5EF4-FFF2-40B4-BE49-F238E27FC236}">
-                <a16:creationId xmlns:a16="http://schemas.microsoft.com/office/drawing/2014/main" id="{B5C0E947-9D73-45DB-ABDE-9F9A73FC586D}"/>
+                <a16:creationId xmlns:a16="http://schemas.microsoft.com/office/drawing/2014/main" id="{422240CD-457C-4666-A36F-EBCE4643FD79}"/>
               </a:ext>
             </a:extLst>
           </p:cNvPr>
@@ -5673,7 +5673,7 @@
           <p:cNvPr id="3" name="">
             <a:extLst xmlns:a="http://schemas.openxmlformats.org/drawingml/2006/main">
               <a:ext uri="{FF2B5EF4-FFF2-40B4-BE49-F238E27FC236}">
-                <a16:creationId xmlns:a16="http://schemas.microsoft.com/office/drawing/2014/main" id="{02C6AE3D-C623-4DA2-978E-CDBCE4520D0B}"/>
+                <a16:creationId xmlns:a16="http://schemas.microsoft.com/office/drawing/2014/main" id="{6EEC6023-2CAF-4E04-91F0-861ACD5D3A3B}"/>
               </a:ext>
             </a:extLst>
           </p:cNvPr>
@@ -5705,7 +5705,7 @@
           <p:cNvPr id="4" name="">
             <a:extLst xmlns:a="http://schemas.openxmlformats.org/drawingml/2006/main">
               <a:ext uri="{FF2B5EF4-FFF2-40B4-BE49-F238E27FC236}">
-                <a16:creationId xmlns:a16="http://schemas.microsoft.com/office/drawing/2014/main" id="{BDA26E02-5CD6-4E55-B73B-CCCD7F6C3BAF}"/>
+                <a16:creationId xmlns:a16="http://schemas.microsoft.com/office/drawing/2014/main" id="{2091484B-7C24-4971-880F-FDEEEF4D1201}"/>
               </a:ext>
             </a:extLst>
           </p:cNvPr>
@@ -5762,7 +5762,7 @@
           <p:cNvPr id="5" name="">
             <a:extLst xmlns:a="http://schemas.openxmlformats.org/drawingml/2006/main">
               <a:ext uri="{FF2B5EF4-FFF2-40B4-BE49-F238E27FC236}">
-                <a16:creationId xmlns:a16="http://schemas.microsoft.com/office/drawing/2014/main" id="{4CA0C4A0-5726-450E-AB4D-48CE2041CCEF}"/>
+                <a16:creationId xmlns:a16="http://schemas.microsoft.com/office/drawing/2014/main" id="{02B3CF3B-C3DD-4709-8F75-C652F2ED8388}"/>
               </a:ext>
             </a:extLst>
           </p:cNvPr>
@@ -5819,7 +5819,7 @@
           <p:cNvPr id="6" name="">
             <a:extLst xmlns:a="http://schemas.openxmlformats.org/drawingml/2006/main">
               <a:ext uri="{FF2B5EF4-FFF2-40B4-BE49-F238E27FC236}">
-                <a16:creationId xmlns:a16="http://schemas.microsoft.com/office/drawing/2014/main" id="{11E3558A-DFE4-45FA-8D3E-42B56979CB15}"/>
+                <a16:creationId xmlns:a16="http://schemas.microsoft.com/office/drawing/2014/main" id="{0C8A6BCB-3204-404A-9D93-7CE605CBC45C}"/>
               </a:ext>
             </a:extLst>
           </p:cNvPr>
@@ -5876,7 +5876,7 @@
           <p:cNvPr id="7" name="">
             <a:extLst xmlns:a="http://schemas.openxmlformats.org/drawingml/2006/main">
               <a:ext uri="{FF2B5EF4-FFF2-40B4-BE49-F238E27FC236}">
-                <a16:creationId xmlns:a16="http://schemas.microsoft.com/office/drawing/2014/main" id="{6BAB4272-24BA-43AE-A47D-8BB1F9EABA3D}"/>
+                <a16:creationId xmlns:a16="http://schemas.microsoft.com/office/drawing/2014/main" id="{8A677689-2B3E-46C3-9BD9-C59F40EC0D3D}"/>
               </a:ext>
             </a:extLst>
           </p:cNvPr>
@@ -5908,7 +5908,7 @@
           <p:cNvPr id="8" name="">
             <a:extLst xmlns:a="http://schemas.openxmlformats.org/drawingml/2006/main">
               <a:ext uri="{FF2B5EF4-FFF2-40B4-BE49-F238E27FC236}">
-                <a16:creationId xmlns:a16="http://schemas.microsoft.com/office/drawing/2014/main" id="{E78BBDFF-5699-4B05-9CDB-9C1F112DACBC}"/>
+                <a16:creationId xmlns:a16="http://schemas.microsoft.com/office/drawing/2014/main" id="{DA89BC45-325B-433A-B7B8-FC6678097620}"/>
               </a:ext>
             </a:extLst>
           </p:cNvPr>
@@ -5965,7 +5965,7 @@
           <p:cNvPr id="9" name="">
             <a:extLst xmlns:a="http://schemas.openxmlformats.org/drawingml/2006/main">
               <a:ext uri="{FF2B5EF4-FFF2-40B4-BE49-F238E27FC236}">
-                <a16:creationId xmlns:a16="http://schemas.microsoft.com/office/drawing/2014/main" id="{2BEEA383-118B-4D73-8BBA-920807733A2E}"/>
+                <a16:creationId xmlns:a16="http://schemas.microsoft.com/office/drawing/2014/main" id="{45CC0181-8854-4F62-B63C-E75C2DB087D9}"/>
               </a:ext>
             </a:extLst>
           </p:cNvPr>
@@ -6022,7 +6022,7 @@
           <p:cNvPr id="10" name="">
             <a:extLst xmlns:a="http://schemas.openxmlformats.org/drawingml/2006/main">
               <a:ext uri="{FF2B5EF4-FFF2-40B4-BE49-F238E27FC236}">
-                <a16:creationId xmlns:a16="http://schemas.microsoft.com/office/drawing/2014/main" id="{B81FD8C0-0343-4E9B-9D95-5B04963E16B6}"/>
+                <a16:creationId xmlns:a16="http://schemas.microsoft.com/office/drawing/2014/main" id="{92A6A76E-DB6C-46F8-A10A-0B8A5D5551DA}"/>
               </a:ext>
             </a:extLst>
           </p:cNvPr>
@@ -6056,7 +6056,7 @@
           <p:cNvPr id="11" name="">
             <a:extLst xmlns:a="http://schemas.openxmlformats.org/drawingml/2006/main">
               <a:ext uri="{FF2B5EF4-FFF2-40B4-BE49-F238E27FC236}">
-                <a16:creationId xmlns:a16="http://schemas.microsoft.com/office/drawing/2014/main" id="{BD847025-FEB1-4902-B524-0F3B8C73FA4C}"/>
+                <a16:creationId xmlns:a16="http://schemas.microsoft.com/office/drawing/2014/main" id="{36D60D79-F55C-4B65-B10E-AC0F079CDC8B}"/>
               </a:ext>
             </a:extLst>
           </p:cNvPr>
@@ -6088,7 +6088,7 @@
           <p:cNvPr id="12" name="">
             <a:extLst xmlns:a="http://schemas.openxmlformats.org/drawingml/2006/main">
               <a:ext uri="{FF2B5EF4-FFF2-40B4-BE49-F238E27FC236}">
-                <a16:creationId xmlns:a16="http://schemas.microsoft.com/office/drawing/2014/main" id="{49F21D94-FF45-44B2-BC57-D0BD72E7A16B}"/>
+                <a16:creationId xmlns:a16="http://schemas.microsoft.com/office/drawing/2014/main" id="{975C7335-3635-42D1-8078-9BC14EEE9F53}"/>
               </a:ext>
             </a:extLst>
           </p:cNvPr>
@@ -6145,7 +6145,7 @@
           <p:cNvPr id="13" name="">
             <a:extLst xmlns:a="http://schemas.openxmlformats.org/drawingml/2006/main">
               <a:ext uri="{FF2B5EF4-FFF2-40B4-BE49-F238E27FC236}">
-                <a16:creationId xmlns:a16="http://schemas.microsoft.com/office/drawing/2014/main" id="{1ACEA9A6-F237-43ED-B8BE-8F031B2C13A6}"/>
+                <a16:creationId xmlns:a16="http://schemas.microsoft.com/office/drawing/2014/main" id="{1B497D0D-B39D-4540-A7C2-ABE9F2B6EB8B}"/>
               </a:ext>
             </a:extLst>
           </p:cNvPr>
@@ -6202,7 +6202,7 @@
           <p:cNvPr id="14" name="">
             <a:extLst xmlns:a="http://schemas.openxmlformats.org/drawingml/2006/main">
               <a:ext uri="{FF2B5EF4-FFF2-40B4-BE49-F238E27FC236}">
-                <a16:creationId xmlns:a16="http://schemas.microsoft.com/office/drawing/2014/main" id="{CBDEE071-A75B-461E-B80B-0159655DF3DC}"/>
+                <a16:creationId xmlns:a16="http://schemas.microsoft.com/office/drawing/2014/main" id="{3EB8F4A8-6816-42A4-B9F7-78A7C0284D70}"/>
               </a:ext>
             </a:extLst>
           </p:cNvPr>
@@ -6236,7 +6236,7 @@
           <p:cNvPr id="15" name="">
             <a:extLst xmlns:a="http://schemas.openxmlformats.org/drawingml/2006/main">
               <a:ext uri="{FF2B5EF4-FFF2-40B4-BE49-F238E27FC236}">
-                <a16:creationId xmlns:a16="http://schemas.microsoft.com/office/drawing/2014/main" id="{AF0A0225-DF84-4365-A4B5-1C9705636F37}"/>
+                <a16:creationId xmlns:a16="http://schemas.microsoft.com/office/drawing/2014/main" id="{D36A16F3-6FEC-4D8A-91D8-C2800B631A48}"/>
               </a:ext>
             </a:extLst>
           </p:cNvPr>
@@ -6268,7 +6268,7 @@
           <p:cNvPr id="16" name="">
             <a:extLst xmlns:a="http://schemas.openxmlformats.org/drawingml/2006/main">
               <a:ext uri="{FF2B5EF4-FFF2-40B4-BE49-F238E27FC236}">
-                <a16:creationId xmlns:a16="http://schemas.microsoft.com/office/drawing/2014/main" id="{9663E63E-1DFB-4EC1-86A7-AC50739396BC}"/>
+                <a16:creationId xmlns:a16="http://schemas.microsoft.com/office/drawing/2014/main" id="{A1C3E6DE-5408-41E3-B076-EFC1738E4E06}"/>
               </a:ext>
             </a:extLst>
           </p:cNvPr>
@@ -6325,7 +6325,7 @@
           <p:cNvPr id="17" name="">
             <a:extLst xmlns:a="http://schemas.openxmlformats.org/drawingml/2006/main">
               <a:ext uri="{FF2B5EF4-FFF2-40B4-BE49-F238E27FC236}">
-                <a16:creationId xmlns:a16="http://schemas.microsoft.com/office/drawing/2014/main" id="{69261780-F847-4889-B5CA-F9F4996F1253}"/>
+                <a16:creationId xmlns:a16="http://schemas.microsoft.com/office/drawing/2014/main" id="{86D39939-0218-433E-A7DE-ED6C0F195FD6}"/>
               </a:ext>
             </a:extLst>
           </p:cNvPr>
@@ -6382,7 +6382,7 @@
           <p:cNvPr id="18" name="">
             <a:extLst xmlns:a="http://schemas.openxmlformats.org/drawingml/2006/main">
               <a:ext uri="{FF2B5EF4-FFF2-40B4-BE49-F238E27FC236}">
-                <a16:creationId xmlns:a16="http://schemas.microsoft.com/office/drawing/2014/main" id="{ADF8FC88-B0AC-4327-B4E2-FF31C44C6287}"/>
+                <a16:creationId xmlns:a16="http://schemas.microsoft.com/office/drawing/2014/main" id="{75F3A2CE-67A5-4F58-A599-E6B52F34F668}"/>
               </a:ext>
             </a:extLst>
           </p:cNvPr>
@@ -6416,7 +6416,7 @@
           <p:cNvPr id="19" name="">
             <a:extLst xmlns:a="http://schemas.openxmlformats.org/drawingml/2006/main">
               <a:ext uri="{FF2B5EF4-FFF2-40B4-BE49-F238E27FC236}">
-                <a16:creationId xmlns:a16="http://schemas.microsoft.com/office/drawing/2014/main" id="{1D462BA8-8FF4-4092-A1B8-F95827C15F3E}"/>
+                <a16:creationId xmlns:a16="http://schemas.microsoft.com/office/drawing/2014/main" id="{9905008F-1CF6-46CB-9F04-F018573CBFA1}"/>
               </a:ext>
             </a:extLst>
           </p:cNvPr>
@@ -6448,7 +6448,7 @@
           <p:cNvPr id="20" name="">
             <a:extLst xmlns:a="http://schemas.openxmlformats.org/drawingml/2006/main">
               <a:ext uri="{FF2B5EF4-FFF2-40B4-BE49-F238E27FC236}">
-                <a16:creationId xmlns:a16="http://schemas.microsoft.com/office/drawing/2014/main" id="{693796F1-190F-4F27-84FE-51D5D838EE37}"/>
+                <a16:creationId xmlns:a16="http://schemas.microsoft.com/office/drawing/2014/main" id="{4BA47FC8-7CBC-45B7-B365-014B62944015}"/>
               </a:ext>
             </a:extLst>
           </p:cNvPr>
@@ -6505,7 +6505,7 @@
           <p:cNvPr id="21" name="">
             <a:extLst xmlns:a="http://schemas.openxmlformats.org/drawingml/2006/main">
               <a:ext uri="{FF2B5EF4-FFF2-40B4-BE49-F238E27FC236}">
-                <a16:creationId xmlns:a16="http://schemas.microsoft.com/office/drawing/2014/main" id="{3D5B6955-8EFE-441E-8A96-03E730C059FA}"/>
+                <a16:creationId xmlns:a16="http://schemas.microsoft.com/office/drawing/2014/main" id="{F56F89F7-5974-4815-9632-065486E3FA6C}"/>
               </a:ext>
             </a:extLst>
           </p:cNvPr>
@@ -6562,7 +6562,7 @@
           <p:cNvPr id="22" name="">
             <a:extLst xmlns:a="http://schemas.openxmlformats.org/drawingml/2006/main">
               <a:ext uri="{FF2B5EF4-FFF2-40B4-BE49-F238E27FC236}">
-                <a16:creationId xmlns:a16="http://schemas.microsoft.com/office/drawing/2014/main" id="{8839DCCF-6374-46CD-BF54-58DE410CB658}"/>
+                <a16:creationId xmlns:a16="http://schemas.microsoft.com/office/drawing/2014/main" id="{33E23202-2052-4D58-8D71-3873546200F9}"/>
               </a:ext>
             </a:extLst>
           </p:cNvPr>
@@ -6617,7 +6617,7 @@
     </p:spTree>
     <p:extLst>
       <p:ext uri="{BB962C8B-B14F-4D97-AF65-F5344CB8AC3E}">
-        <p14:creationId xmlns:p14="http://schemas.microsoft.com/office/powerpoint/2010/main" val="1442060372"/>
+        <p14:creationId xmlns:p14="http://schemas.microsoft.com/office/powerpoint/2010/main" val="2147298583"/>
       </p:ext>
     </p:extLst>
   </p:cSld>
@@ -6818,7 +6818,7 @@
           <p:cNvPr id="16" name="">
             <a:extLst xmlns:a="http://schemas.openxmlformats.org/drawingml/2006/main">
               <a:ext uri="{FF2B5EF4-FFF2-40B4-BE49-F238E27FC236}">
-                <a16:creationId xmlns:a16="http://schemas.microsoft.com/office/drawing/2014/main" id="{3DAA83CE-8B02-4D81-9256-4955AF6B525F}"/>
+                <a16:creationId xmlns:a16="http://schemas.microsoft.com/office/drawing/2014/main" id="{7AEA07AC-8646-449A-BFCA-A1E5AC7B9867}"/>
               </a:ext>
             </a:extLst>
           </p:cNvPr>
@@ -6850,7 +6850,7 @@
           <p:cNvPr id="2" name="">
             <a:extLst xmlns:a="http://schemas.openxmlformats.org/drawingml/2006/main">
               <a:ext uri="{FF2B5EF4-FFF2-40B4-BE49-F238E27FC236}">
-                <a16:creationId xmlns:a16="http://schemas.microsoft.com/office/drawing/2014/main" id="{36C46A4F-9852-48D8-B446-95394CBF49D3}"/>
+                <a16:creationId xmlns:a16="http://schemas.microsoft.com/office/drawing/2014/main" id="{FA7AF286-4AA5-446F-830D-C7B2D92A5C3D}"/>
               </a:ext>
             </a:extLst>
           </p:cNvPr>
@@ -6907,7 +6907,7 @@
           <p:cNvPr id="3" name="">
             <a:extLst xmlns:a="http://schemas.openxmlformats.org/drawingml/2006/main">
               <a:ext uri="{FF2B5EF4-FFF2-40B4-BE49-F238E27FC236}">
-                <a16:creationId xmlns:a16="http://schemas.microsoft.com/office/drawing/2014/main" id="{F697B8A0-0FFD-4C72-99AD-0EC63A99D93A}"/>
+                <a16:creationId xmlns:a16="http://schemas.microsoft.com/office/drawing/2014/main" id="{31134F61-38AF-4F29-B184-C780A68AEBD2}"/>
               </a:ext>
             </a:extLst>
           </p:cNvPr>
@@ -6939,7 +6939,7 @@
           <p:cNvPr id="4" name="">
             <a:extLst xmlns:a="http://schemas.openxmlformats.org/drawingml/2006/main">
               <a:ext uri="{FF2B5EF4-FFF2-40B4-BE49-F238E27FC236}">
-                <a16:creationId xmlns:a16="http://schemas.microsoft.com/office/drawing/2014/main" id="{E7065522-3320-4C7A-A8D5-F565AA1C27A4}"/>
+                <a16:creationId xmlns:a16="http://schemas.microsoft.com/office/drawing/2014/main" id="{165C3BA5-E305-4CC3-874A-EB98C390F4DE}"/>
               </a:ext>
             </a:extLst>
           </p:cNvPr>
@@ -6996,7 +6996,7 @@
           <p:cNvPr id="5" name="">
             <a:extLst xmlns:a="http://schemas.openxmlformats.org/drawingml/2006/main">
               <a:ext uri="{FF2B5EF4-FFF2-40B4-BE49-F238E27FC236}">
-                <a16:creationId xmlns:a16="http://schemas.microsoft.com/office/drawing/2014/main" id="{374AB53C-81AC-4DCF-9DF5-90C6D80000F1}"/>
+                <a16:creationId xmlns:a16="http://schemas.microsoft.com/office/drawing/2014/main" id="{6ACCA862-201C-434D-B125-745FA7F5FAA7}"/>
               </a:ext>
             </a:extLst>
           </p:cNvPr>
@@ -7053,7 +7053,7 @@
           <p:cNvPr id="6" name="">
             <a:extLst xmlns:a="http://schemas.openxmlformats.org/drawingml/2006/main">
               <a:ext uri="{FF2B5EF4-FFF2-40B4-BE49-F238E27FC236}">
-                <a16:creationId xmlns:a16="http://schemas.microsoft.com/office/drawing/2014/main" id="{63EEB96D-8579-44AB-B8B1-CE930AB64688}"/>
+                <a16:creationId xmlns:a16="http://schemas.microsoft.com/office/drawing/2014/main" id="{3C35DCD2-DA86-4B8E-B5BC-664362326A56}"/>
               </a:ext>
             </a:extLst>
           </p:cNvPr>
@@ -7110,7 +7110,7 @@
           <p:cNvPr id="7" name="">
             <a:extLst xmlns:a="http://schemas.openxmlformats.org/drawingml/2006/main">
               <a:ext uri="{FF2B5EF4-FFF2-40B4-BE49-F238E27FC236}">
-                <a16:creationId xmlns:a16="http://schemas.microsoft.com/office/drawing/2014/main" id="{55626D95-1D41-4D5A-B336-0E8956876D7D}"/>
+                <a16:creationId xmlns:a16="http://schemas.microsoft.com/office/drawing/2014/main" id="{67F473FC-7B51-4108-A87F-0C88E580CA0A}"/>
               </a:ext>
             </a:extLst>
           </p:cNvPr>
@@ -7142,7 +7142,7 @@
           <p:cNvPr id="8" name="">
             <a:extLst xmlns:a="http://schemas.openxmlformats.org/drawingml/2006/main">
               <a:ext uri="{FF2B5EF4-FFF2-40B4-BE49-F238E27FC236}">
-                <a16:creationId xmlns:a16="http://schemas.microsoft.com/office/drawing/2014/main" id="{76D60558-13B3-4B4F-850C-AFD35C1CC1E1}"/>
+                <a16:creationId xmlns:a16="http://schemas.microsoft.com/office/drawing/2014/main" id="{CEE1BC9E-4982-4F6E-AB09-479DBA9FE7D3}"/>
               </a:ext>
             </a:extLst>
           </p:cNvPr>
@@ -7199,7 +7199,7 @@
           <p:cNvPr id="9" name="">
             <a:extLst xmlns:a="http://schemas.openxmlformats.org/drawingml/2006/main">
               <a:ext uri="{FF2B5EF4-FFF2-40B4-BE49-F238E27FC236}">
-                <a16:creationId xmlns:a16="http://schemas.microsoft.com/office/drawing/2014/main" id="{EF3E539A-5364-4C90-B6A1-04B9C32BC85C}"/>
+                <a16:creationId xmlns:a16="http://schemas.microsoft.com/office/drawing/2014/main" id="{57D5F992-FBE1-4AEF-992B-E42026EDAC1E}"/>
               </a:ext>
             </a:extLst>
           </p:cNvPr>
@@ -7256,7 +7256,7 @@
           <p:cNvPr id="10" name="">
             <a:extLst xmlns:a="http://schemas.openxmlformats.org/drawingml/2006/main">
               <a:ext uri="{FF2B5EF4-FFF2-40B4-BE49-F238E27FC236}">
-                <a16:creationId xmlns:a16="http://schemas.microsoft.com/office/drawing/2014/main" id="{6B678CCD-6D10-4F64-B2ED-F783FC9E7EF2}"/>
+                <a16:creationId xmlns:a16="http://schemas.microsoft.com/office/drawing/2014/main" id="{35D92CE1-4C4B-489B-8092-DA124F756223}"/>
               </a:ext>
             </a:extLst>
           </p:cNvPr>
@@ -7313,7 +7313,7 @@
           <p:cNvPr id="11" name="">
             <a:extLst xmlns:a="http://schemas.openxmlformats.org/drawingml/2006/main">
               <a:ext uri="{FF2B5EF4-FFF2-40B4-BE49-F238E27FC236}">
-                <a16:creationId xmlns:a16="http://schemas.microsoft.com/office/drawing/2014/main" id="{896FCEE8-6E89-4DDD-B542-1B105BC0A0FF}"/>
+                <a16:creationId xmlns:a16="http://schemas.microsoft.com/office/drawing/2014/main" id="{6CBA0A34-B990-40FC-B727-53D9C2239F3C}"/>
               </a:ext>
             </a:extLst>
           </p:cNvPr>
@@ -7345,7 +7345,7 @@
           <p:cNvPr id="12" name="">
             <a:extLst xmlns:a="http://schemas.openxmlformats.org/drawingml/2006/main">
               <a:ext uri="{FF2B5EF4-FFF2-40B4-BE49-F238E27FC236}">
-                <a16:creationId xmlns:a16="http://schemas.microsoft.com/office/drawing/2014/main" id="{5C42F97F-5D49-4201-8C30-6BA5608FCE77}"/>
+                <a16:creationId xmlns:a16="http://schemas.microsoft.com/office/drawing/2014/main" id="{E2A4CA42-E61E-4195-AB96-F6622A0B0F5E}"/>
               </a:ext>
             </a:extLst>
           </p:cNvPr>
@@ -7402,7 +7402,7 @@
           <p:cNvPr id="13" name="">
             <a:extLst xmlns:a="http://schemas.openxmlformats.org/drawingml/2006/main">
               <a:ext uri="{FF2B5EF4-FFF2-40B4-BE49-F238E27FC236}">
-                <a16:creationId xmlns:a16="http://schemas.microsoft.com/office/drawing/2014/main" id="{0080143F-3220-4E10-873F-7BDD60BDF4DF}"/>
+                <a16:creationId xmlns:a16="http://schemas.microsoft.com/office/drawing/2014/main" id="{0AC76051-6E13-4087-86D8-0DDF62E25F38}"/>
               </a:ext>
             </a:extLst>
           </p:cNvPr>
@@ -7459,7 +7459,7 @@
           <p:cNvPr id="14" name="">
             <a:extLst xmlns:a="http://schemas.openxmlformats.org/drawingml/2006/main">
               <a:ext uri="{FF2B5EF4-FFF2-40B4-BE49-F238E27FC236}">
-                <a16:creationId xmlns:a16="http://schemas.microsoft.com/office/drawing/2014/main" id="{6420DB1D-9CCD-4F36-B4A4-AFA26E33F55D}"/>
+                <a16:creationId xmlns:a16="http://schemas.microsoft.com/office/drawing/2014/main" id="{4D3520CB-20F1-494F-B885-4538FD6E7A86}"/>
               </a:ext>
             </a:extLst>
           </p:cNvPr>
@@ -7516,7 +7516,7 @@
           <p:cNvPr id="15" name="">
             <a:extLst xmlns:a="http://schemas.openxmlformats.org/drawingml/2006/main">
               <a:ext uri="{FF2B5EF4-FFF2-40B4-BE49-F238E27FC236}">
-                <a16:creationId xmlns:a16="http://schemas.microsoft.com/office/drawing/2014/main" id="{596AA11E-30D8-44E1-ABEC-1891CDFFC2AC}"/>
+                <a16:creationId xmlns:a16="http://schemas.microsoft.com/office/drawing/2014/main" id="{1059BCA3-9D7A-4BD0-8C05-3CC85A380CEB}"/>
               </a:ext>
             </a:extLst>
           </p:cNvPr>
@@ -7571,7 +7571,7 @@
     </p:spTree>
     <p:extLst>
       <p:ext uri="{BB962C8B-B14F-4D97-AF65-F5344CB8AC3E}">
-        <p14:creationId xmlns:p14="http://schemas.microsoft.com/office/powerpoint/2010/main" val="2135454331"/>
+        <p14:creationId xmlns:p14="http://schemas.microsoft.com/office/powerpoint/2010/main" val="468080350"/>
       </p:ext>
     </p:extLst>
   </p:cSld>
@@ -7772,7 +7772,7 @@
           <p:cNvPr id="23" name="">
             <a:extLst xmlns:a="http://schemas.openxmlformats.org/drawingml/2006/main">
               <a:ext uri="{FF2B5EF4-FFF2-40B4-BE49-F238E27FC236}">
-                <a16:creationId xmlns:a16="http://schemas.microsoft.com/office/drawing/2014/main" id="{C3A4AF9D-3044-43E6-B9F0-B372932B486B}"/>
+                <a16:creationId xmlns:a16="http://schemas.microsoft.com/office/drawing/2014/main" id="{30E3D9F3-2091-4864-8B3E-847B0BA9CC1D}"/>
               </a:ext>
             </a:extLst>
           </p:cNvPr>
@@ -7804,7 +7804,7 @@
           <p:cNvPr id="2" name="">
             <a:extLst xmlns:a="http://schemas.openxmlformats.org/drawingml/2006/main">
               <a:ext uri="{FF2B5EF4-FFF2-40B4-BE49-F238E27FC236}">
-                <a16:creationId xmlns:a16="http://schemas.microsoft.com/office/drawing/2014/main" id="{11578E28-59A6-4672-A957-D06B3524D1F9}"/>
+                <a16:creationId xmlns:a16="http://schemas.microsoft.com/office/drawing/2014/main" id="{8401FA9C-CAB4-4A68-9E53-59A1AB4407E1}"/>
               </a:ext>
             </a:extLst>
           </p:cNvPr>
@@ -7861,7 +7861,7 @@
           <p:cNvPr id="3" name="">
             <a:extLst xmlns:a="http://schemas.openxmlformats.org/drawingml/2006/main">
               <a:ext uri="{FF2B5EF4-FFF2-40B4-BE49-F238E27FC236}">
-                <a16:creationId xmlns:a16="http://schemas.microsoft.com/office/drawing/2014/main" id="{10BDCCA1-02F8-4E36-A8E9-623E00BBFE8D}"/>
+                <a16:creationId xmlns:a16="http://schemas.microsoft.com/office/drawing/2014/main" id="{6FBE2044-D445-4C28-909D-C27C0652F6B4}"/>
               </a:ext>
             </a:extLst>
           </p:cNvPr>
@@ -7893,7 +7893,7 @@
           <p:cNvPr id="4" name="">
             <a:extLst xmlns:a="http://schemas.openxmlformats.org/drawingml/2006/main">
               <a:ext uri="{FF2B5EF4-FFF2-40B4-BE49-F238E27FC236}">
-                <a16:creationId xmlns:a16="http://schemas.microsoft.com/office/drawing/2014/main" id="{30583F81-C46F-4301-8596-4DB675FF810D}"/>
+                <a16:creationId xmlns:a16="http://schemas.microsoft.com/office/drawing/2014/main" id="{A4DA5441-0832-41B9-998A-883B832EAECE}"/>
               </a:ext>
             </a:extLst>
           </p:cNvPr>
@@ -7950,7 +7950,7 @@
           <p:cNvPr id="5" name="">
             <a:extLst xmlns:a="http://schemas.openxmlformats.org/drawingml/2006/main">
               <a:ext uri="{FF2B5EF4-FFF2-40B4-BE49-F238E27FC236}">
-                <a16:creationId xmlns:a16="http://schemas.microsoft.com/office/drawing/2014/main" id="{09C8BD80-F174-4EE2-91E3-DB99EDCF74D6}"/>
+                <a16:creationId xmlns:a16="http://schemas.microsoft.com/office/drawing/2014/main" id="{EF6812FD-011B-4FFE-9EDE-D423BCE80EF0}"/>
               </a:ext>
             </a:extLst>
           </p:cNvPr>
@@ -8007,7 +8007,7 @@
           <p:cNvPr id="6" name="">
             <a:extLst xmlns:a="http://schemas.openxmlformats.org/drawingml/2006/main">
               <a:ext uri="{FF2B5EF4-FFF2-40B4-BE49-F238E27FC236}">
-                <a16:creationId xmlns:a16="http://schemas.microsoft.com/office/drawing/2014/main" id="{F426207D-3CF6-462D-AC25-169C661D5323}"/>
+                <a16:creationId xmlns:a16="http://schemas.microsoft.com/office/drawing/2014/main" id="{BD5F6473-2A21-4471-9858-8498AF4D0577}"/>
               </a:ext>
             </a:extLst>
           </p:cNvPr>
@@ -8064,7 +8064,7 @@
           <p:cNvPr id="7" name="">
             <a:extLst xmlns:a="http://schemas.openxmlformats.org/drawingml/2006/main">
               <a:ext uri="{FF2B5EF4-FFF2-40B4-BE49-F238E27FC236}">
-                <a16:creationId xmlns:a16="http://schemas.microsoft.com/office/drawing/2014/main" id="{8FB9421D-B456-488F-868D-EA01543C331D}"/>
+                <a16:creationId xmlns:a16="http://schemas.microsoft.com/office/drawing/2014/main" id="{4350CB51-9BD5-4E8B-9086-3CB58E2EA34B}"/>
               </a:ext>
             </a:extLst>
           </p:cNvPr>
@@ -8096,7 +8096,7 @@
           <p:cNvPr id="8" name="">
             <a:extLst xmlns:a="http://schemas.openxmlformats.org/drawingml/2006/main">
               <a:ext uri="{FF2B5EF4-FFF2-40B4-BE49-F238E27FC236}">
-                <a16:creationId xmlns:a16="http://schemas.microsoft.com/office/drawing/2014/main" id="{EA75D032-AA9B-4B54-9D38-85D3F79F9697}"/>
+                <a16:creationId xmlns:a16="http://schemas.microsoft.com/office/drawing/2014/main" id="{BE3BAB0D-7B93-436F-9793-000C1EAAB035}"/>
               </a:ext>
             </a:extLst>
           </p:cNvPr>
@@ -8153,7 +8153,7 @@
           <p:cNvPr id="9" name="">
             <a:extLst xmlns:a="http://schemas.openxmlformats.org/drawingml/2006/main">
               <a:ext uri="{FF2B5EF4-FFF2-40B4-BE49-F238E27FC236}">
-                <a16:creationId xmlns:a16="http://schemas.microsoft.com/office/drawing/2014/main" id="{3A63EE56-4791-4D90-AE62-E9D608327B80}"/>
+                <a16:creationId xmlns:a16="http://schemas.microsoft.com/office/drawing/2014/main" id="{5E3EAF92-BB47-4BA2-90D8-1D848FBF81A9}"/>
               </a:ext>
             </a:extLst>
           </p:cNvPr>
@@ -8210,19 +8210,19 @@
           <p:cNvPr id="10" name="">
             <a:extLst xmlns:a="http://schemas.openxmlformats.org/drawingml/2006/main">
               <a:ext uri="{FF2B5EF4-FFF2-40B4-BE49-F238E27FC236}">
-                <a16:creationId xmlns:a16="http://schemas.microsoft.com/office/drawing/2014/main" id="{C78680CB-E825-4F7C-BC9A-46D4893FD3AA}"/>
-              </a:ext>
-            </a:extLst>
-          </p:cNvPr>
-          <p:cNvSpPr>
-            <a:spLocks xmlns:a="http://schemas.openxmlformats.org/drawingml/2006/main" noGrp="1"/>
-          </p:cNvSpPr>
-          <p:nvPr/>
-        </p:nvSpPr>
-        <p:spPr>
-          <a:xfrm xmlns:a="http://schemas.openxmlformats.org/drawingml/2006/main">
-            <a:off x="914400" y="1257300"/>
-            <a:ext cx="10363200" cy="781050"/>
+                <a16:creationId xmlns:a16="http://schemas.microsoft.com/office/drawing/2014/main" id="{13121787-98AA-41F0-BABE-F5BD8B066840}"/>
+              </a:ext>
+            </a:extLst>
+          </p:cNvPr>
+          <p:cNvSpPr>
+            <a:spLocks xmlns:a="http://schemas.openxmlformats.org/drawingml/2006/main" noGrp="1"/>
+          </p:cNvSpPr>
+          <p:nvPr/>
+        </p:nvSpPr>
+        <p:spPr>
+          <a:xfrm xmlns:a="http://schemas.openxmlformats.org/drawingml/2006/main">
+            <a:off x="857250" y="1219200"/>
+            <a:ext cx="10477500" cy="742950"/>
           </a:xfrm>
           <a:prstGeom xmlns:a="http://schemas.openxmlformats.org/drawingml/2006/main" prst="rect">
             <a:avLst/>
@@ -8239,7 +8239,7 @@
           <a:lstStyle xmlns:a="http://schemas.openxmlformats.org/drawingml/2006/main"/>
           <a:p xmlns:a="http://schemas.openxmlformats.org/drawingml/2006/main">
             <a:pPr algn="ctr">
-              <a:defRPr sz="2175" b="1">
+              <a:defRPr sz="2100" b="1">
                 <a:solidFill>
                   <a:srgbClr val="17253A"/>
                 </a:solidFill>
@@ -8249,7 +8249,7 @@
               </a:defRPr>
             </a:pPr>
             <a:r>
-              <a:rPr sz="2175" b="1">
+              <a:rPr sz="2100" b="1">
                 <a:solidFill>
                   <a:srgbClr val="17253A"/>
                 </a:solidFill>
@@ -8267,28 +8267,30 @@
           <p:cNvPr id="11" name="">
             <a:extLst xmlns:a="http://schemas.openxmlformats.org/drawingml/2006/main">
               <a:ext uri="{FF2B5EF4-FFF2-40B4-BE49-F238E27FC236}">
-                <a16:creationId xmlns:a16="http://schemas.microsoft.com/office/drawing/2014/main" id="{FEAD0AD0-3928-4F3A-92F0-0ED947C094B3}"/>
-              </a:ext>
-            </a:extLst>
-          </p:cNvPr>
-          <p:cNvSpPr>
-            <a:spLocks xmlns:a="http://schemas.openxmlformats.org/drawingml/2006/main" noGrp="1"/>
-          </p:cNvSpPr>
-          <p:nvPr/>
-        </p:nvSpPr>
-        <p:spPr>
-          <a:xfrm xmlns:a="http://schemas.openxmlformats.org/drawingml/2006/main">
-            <a:off x="1000125" y="2247900"/>
-            <a:ext cx="476250" cy="476250"/>
-          </a:xfrm>
-          <a:prstGeom xmlns:a="http://schemas.openxmlformats.org/drawingml/2006/main" prst="ellipse">
+                <a16:creationId xmlns:a16="http://schemas.microsoft.com/office/drawing/2014/main" id="{2658905C-A096-4970-AA12-9D5ADED58774}"/>
+              </a:ext>
+            </a:extLst>
+          </p:cNvPr>
+          <p:cNvSpPr>
+            <a:spLocks xmlns:a="http://schemas.openxmlformats.org/drawingml/2006/main" noGrp="1"/>
+          </p:cNvSpPr>
+          <p:nvPr/>
+        </p:nvSpPr>
+        <p:spPr>
+          <a:xfrm xmlns:a="http://schemas.openxmlformats.org/drawingml/2006/main">
+            <a:off x="971550" y="2124075"/>
+            <a:ext cx="38100" cy="3524250"/>
+          </a:xfrm>
+          <a:prstGeom xmlns:a="http://schemas.openxmlformats.org/drawingml/2006/main" prst="rect">
             <a:avLst/>
           </a:prstGeom>
           <a:solidFill xmlns:a="http://schemas.openxmlformats.org/drawingml/2006/main">
-            <a:srgbClr val="18324A"/>
+            <a:srgbClr val="2C6E73"/>
           </a:solidFill>
           <a:ln xmlns:a="http://schemas.openxmlformats.org/drawingml/2006/main" w="0">
-            <a:noFill/>
+            <a:solidFill>
+              <a:srgbClr val="2C6E73"/>
+            </a:solidFill>
           </a:ln>
         </p:spPr>
       </p:sp>
@@ -8297,19 +8299,19 @@
           <p:cNvPr id="12" name="">
             <a:extLst xmlns:a="http://schemas.openxmlformats.org/drawingml/2006/main">
               <a:ext uri="{FF2B5EF4-FFF2-40B4-BE49-F238E27FC236}">
-                <a16:creationId xmlns:a16="http://schemas.microsoft.com/office/drawing/2014/main" id="{70B27B66-9858-4B7E-955C-55EA8C038D4D}"/>
-              </a:ext>
-            </a:extLst>
-          </p:cNvPr>
-          <p:cNvSpPr>
-            <a:spLocks xmlns:a="http://schemas.openxmlformats.org/drawingml/2006/main" noGrp="1"/>
-          </p:cNvSpPr>
-          <p:nvPr/>
-        </p:nvSpPr>
-        <p:spPr>
-          <a:xfrm xmlns:a="http://schemas.openxmlformats.org/drawingml/2006/main">
-            <a:off x="1000125" y="2276475"/>
-            <a:ext cx="476250" cy="419100"/>
+                <a16:creationId xmlns:a16="http://schemas.microsoft.com/office/drawing/2014/main" id="{5A9AB028-3E15-4E38-AA7E-DB700D1A2A4A}"/>
+              </a:ext>
+            </a:extLst>
+          </p:cNvPr>
+          <p:cNvSpPr>
+            <a:spLocks xmlns:a="http://schemas.openxmlformats.org/drawingml/2006/main" noGrp="1"/>
+          </p:cNvSpPr>
+          <p:nvPr/>
+        </p:nvSpPr>
+        <p:spPr>
+          <a:xfrm xmlns:a="http://schemas.openxmlformats.org/drawingml/2006/main">
+            <a:off x="1162050" y="2200275"/>
+            <a:ext cx="400050" cy="400050"/>
           </a:xfrm>
           <a:prstGeom xmlns:a="http://schemas.openxmlformats.org/drawingml/2006/main" prst="rect">
             <a:avLst/>
@@ -8326,9 +8328,9 @@
           <a:lstStyle xmlns:a="http://schemas.openxmlformats.org/drawingml/2006/main"/>
           <a:p xmlns:a="http://schemas.openxmlformats.org/drawingml/2006/main">
             <a:pPr algn="ctr">
-              <a:defRPr sz="1350" b="1">
-                <a:solidFill>
-                  <a:srgbClr val="FFFFFF"/>
+              <a:defRPr sz="1125" b="1">
+                <a:solidFill>
+                  <a:srgbClr val="2C6E73"/>
                 </a:solidFill>
                 <a:latin typeface="Arial"/>
                 <a:ea typeface="Arial"/>
@@ -8336,9 +8338,9 @@
               </a:defRPr>
             </a:pPr>
             <a:r>
-              <a:rPr sz="1350" b="1">
-                <a:solidFill>
-                  <a:srgbClr val="FFFFFF"/>
+              <a:rPr sz="1125" b="1">
+                <a:solidFill>
+                  <a:srgbClr val="2C6E73"/>
                 </a:solidFill>
                 <a:latin typeface="Arial"/>
                 <a:ea typeface="Arial"/>
@@ -8354,19 +8356,19 @@
           <p:cNvPr id="13" name="">
             <a:extLst xmlns:a="http://schemas.openxmlformats.org/drawingml/2006/main">
               <a:ext uri="{FF2B5EF4-FFF2-40B4-BE49-F238E27FC236}">
-                <a16:creationId xmlns:a16="http://schemas.microsoft.com/office/drawing/2014/main" id="{ECE022B2-7D53-4981-8FB5-FFCAACC48436}"/>
-              </a:ext>
-            </a:extLst>
-          </p:cNvPr>
-          <p:cNvSpPr>
-            <a:spLocks xmlns:a="http://schemas.openxmlformats.org/drawingml/2006/main" noGrp="1"/>
-          </p:cNvSpPr>
-          <p:nvPr/>
-        </p:nvSpPr>
-        <p:spPr>
-          <a:xfrm xmlns:a="http://schemas.openxmlformats.org/drawingml/2006/main">
-            <a:off x="1714500" y="2181225"/>
-            <a:ext cx="9429750" cy="609600"/>
+                <a16:creationId xmlns:a16="http://schemas.microsoft.com/office/drawing/2014/main" id="{3A444459-BED6-4929-B05C-63FC96221B8D}"/>
+              </a:ext>
+            </a:extLst>
+          </p:cNvPr>
+          <p:cNvSpPr>
+            <a:spLocks xmlns:a="http://schemas.openxmlformats.org/drawingml/2006/main" noGrp="1"/>
+          </p:cNvSpPr>
+          <p:nvPr/>
+        </p:nvSpPr>
+        <p:spPr>
+          <a:xfrm xmlns:a="http://schemas.openxmlformats.org/drawingml/2006/main">
+            <a:off x="1714500" y="2114550"/>
+            <a:ext cx="9525000" cy="809625"/>
           </a:xfrm>
           <a:prstGeom xmlns:a="http://schemas.openxmlformats.org/drawingml/2006/main" prst="rect">
             <a:avLst/>
@@ -8383,7 +8385,7 @@
           <a:lstStyle xmlns:a="http://schemas.openxmlformats.org/drawingml/2006/main"/>
           <a:p xmlns:a="http://schemas.openxmlformats.org/drawingml/2006/main">
             <a:pPr algn="l">
-              <a:defRPr sz="1500" b="0">
+              <a:defRPr sz="1725" b="0">
                 <a:solidFill>
                   <a:srgbClr val="17253A"/>
                 </a:solidFill>
@@ -8393,7 +8395,7 @@
               </a:defRPr>
             </a:pPr>
             <a:r>
-              <a:rPr sz="1500" b="0">
+              <a:rPr sz="1725" b="0">
                 <a:solidFill>
                   <a:srgbClr val="17253A"/>
                 </a:solidFill>
@@ -8401,7 +8403,7 @@
                 <a:ea typeface="Arial"/>
                 <a:cs typeface="Arial"/>
               </a:rPr>
-              <a:t>Identify the structure: Identify the domain and retrieve the relevant representation or method.</a:t>
+              <a:t>45 : 60</a:t>
             </a:r>
           </a:p>
         </p:txBody>
@@ -8411,28 +8413,30 @@
           <p:cNvPr id="14" name="">
             <a:extLst xmlns:a="http://schemas.openxmlformats.org/drawingml/2006/main">
               <a:ext uri="{FF2B5EF4-FFF2-40B4-BE49-F238E27FC236}">
-                <a16:creationId xmlns:a16="http://schemas.microsoft.com/office/drawing/2014/main" id="{A0CFA849-2B00-4769-8630-C51949EF87D7}"/>
-              </a:ext>
-            </a:extLst>
-          </p:cNvPr>
-          <p:cNvSpPr>
-            <a:spLocks xmlns:a="http://schemas.openxmlformats.org/drawingml/2006/main" noGrp="1"/>
-          </p:cNvSpPr>
-          <p:nvPr/>
-        </p:nvSpPr>
-        <p:spPr>
-          <a:xfrm xmlns:a="http://schemas.openxmlformats.org/drawingml/2006/main">
-            <a:off x="1000125" y="2990850"/>
-            <a:ext cx="476250" cy="476250"/>
-          </a:xfrm>
-          <a:prstGeom xmlns:a="http://schemas.openxmlformats.org/drawingml/2006/main" prst="ellipse">
+                <a16:creationId xmlns:a16="http://schemas.microsoft.com/office/drawing/2014/main" id="{74733E8A-93AC-46DB-A802-7A49F7BB896D}"/>
+              </a:ext>
+            </a:extLst>
+          </p:cNvPr>
+          <p:cNvSpPr>
+            <a:spLocks xmlns:a="http://schemas.openxmlformats.org/drawingml/2006/main" noGrp="1"/>
+          </p:cNvSpPr>
+          <p:nvPr/>
+        </p:nvSpPr>
+        <p:spPr>
+          <a:xfrm xmlns:a="http://schemas.openxmlformats.org/drawingml/2006/main">
+            <a:off x="1714500" y="2943225"/>
+            <a:ext cx="9334500" cy="9525"/>
+          </a:xfrm>
+          <a:prstGeom xmlns:a="http://schemas.openxmlformats.org/drawingml/2006/main" prst="rect">
             <a:avLst/>
           </a:prstGeom>
           <a:solidFill xmlns:a="http://schemas.openxmlformats.org/drawingml/2006/main">
-            <a:srgbClr val="2C6E73"/>
+            <a:srgbClr val="D9E0E6"/>
           </a:solidFill>
           <a:ln xmlns:a="http://schemas.openxmlformats.org/drawingml/2006/main" w="0">
-            <a:noFill/>
+            <a:solidFill>
+              <a:srgbClr val="D9E0E6"/>
+            </a:solidFill>
           </a:ln>
         </p:spPr>
       </p:sp>
@@ -8441,19 +8445,19 @@
           <p:cNvPr id="15" name="">
             <a:extLst xmlns:a="http://schemas.openxmlformats.org/drawingml/2006/main">
               <a:ext uri="{FF2B5EF4-FFF2-40B4-BE49-F238E27FC236}">
-                <a16:creationId xmlns:a16="http://schemas.microsoft.com/office/drawing/2014/main" id="{C6A859A3-249E-4DE8-8037-986C3098AA5C}"/>
-              </a:ext>
-            </a:extLst>
-          </p:cNvPr>
-          <p:cNvSpPr>
-            <a:spLocks xmlns:a="http://schemas.openxmlformats.org/drawingml/2006/main" noGrp="1"/>
-          </p:cNvSpPr>
-          <p:nvPr/>
-        </p:nvSpPr>
-        <p:spPr>
-          <a:xfrm xmlns:a="http://schemas.openxmlformats.org/drawingml/2006/main">
-            <a:off x="1000125" y="3019425"/>
-            <a:ext cx="476250" cy="419100"/>
+                <a16:creationId xmlns:a16="http://schemas.microsoft.com/office/drawing/2014/main" id="{6B964644-0E3D-4B7E-BB78-B07BA6DCA351}"/>
+              </a:ext>
+            </a:extLst>
+          </p:cNvPr>
+          <p:cNvSpPr>
+            <a:spLocks xmlns:a="http://schemas.openxmlformats.org/drawingml/2006/main" noGrp="1"/>
+          </p:cNvSpPr>
+          <p:nvPr/>
+        </p:nvSpPr>
+        <p:spPr>
+          <a:xfrm xmlns:a="http://schemas.openxmlformats.org/drawingml/2006/main">
+            <a:off x="1162050" y="3076575"/>
+            <a:ext cx="400050" cy="400050"/>
           </a:xfrm>
           <a:prstGeom xmlns:a="http://schemas.openxmlformats.org/drawingml/2006/main" prst="rect">
             <a:avLst/>
@@ -8470,9 +8474,9 @@
           <a:lstStyle xmlns:a="http://schemas.openxmlformats.org/drawingml/2006/main"/>
           <a:p xmlns:a="http://schemas.openxmlformats.org/drawingml/2006/main">
             <a:pPr algn="ctr">
-              <a:defRPr sz="1350" b="1">
-                <a:solidFill>
-                  <a:srgbClr val="FFFFFF"/>
+              <a:defRPr sz="1125" b="1">
+                <a:solidFill>
+                  <a:srgbClr val="2C6E73"/>
                 </a:solidFill>
                 <a:latin typeface="Arial"/>
                 <a:ea typeface="Arial"/>
@@ -8480,9 +8484,9 @@
               </a:defRPr>
             </a:pPr>
             <a:r>
-              <a:rPr sz="1350" b="1">
-                <a:solidFill>
-                  <a:srgbClr val="FFFFFF"/>
+              <a:rPr sz="1125" b="1">
+                <a:solidFill>
+                  <a:srgbClr val="2C6E73"/>
                 </a:solidFill>
                 <a:latin typeface="Arial"/>
                 <a:ea typeface="Arial"/>
@@ -8498,19 +8502,19 @@
           <p:cNvPr id="16" name="">
             <a:extLst xmlns:a="http://schemas.openxmlformats.org/drawingml/2006/main">
               <a:ext uri="{FF2B5EF4-FFF2-40B4-BE49-F238E27FC236}">
-                <a16:creationId xmlns:a16="http://schemas.microsoft.com/office/drawing/2014/main" id="{0F1582FC-72ED-460C-AF77-6E46BA72F658}"/>
-              </a:ext>
-            </a:extLst>
-          </p:cNvPr>
-          <p:cNvSpPr>
-            <a:spLocks xmlns:a="http://schemas.openxmlformats.org/drawingml/2006/main" noGrp="1"/>
-          </p:cNvSpPr>
-          <p:nvPr/>
-        </p:nvSpPr>
-        <p:spPr>
-          <a:xfrm xmlns:a="http://schemas.openxmlformats.org/drawingml/2006/main">
-            <a:off x="1714500" y="2924175"/>
-            <a:ext cx="9429750" cy="609600"/>
+                <a16:creationId xmlns:a16="http://schemas.microsoft.com/office/drawing/2014/main" id="{595114C2-5111-4647-864C-33901719208B}"/>
+              </a:ext>
+            </a:extLst>
+          </p:cNvPr>
+          <p:cNvSpPr>
+            <a:spLocks xmlns:a="http://schemas.openxmlformats.org/drawingml/2006/main" noGrp="1"/>
+          </p:cNvSpPr>
+          <p:nvPr/>
+        </p:nvSpPr>
+        <p:spPr>
+          <a:xfrm xmlns:a="http://schemas.openxmlformats.org/drawingml/2006/main">
+            <a:off x="1714500" y="2990850"/>
+            <a:ext cx="9525000" cy="809625"/>
           </a:xfrm>
           <a:prstGeom xmlns:a="http://schemas.openxmlformats.org/drawingml/2006/main" prst="rect">
             <a:avLst/>
@@ -8527,7 +8531,7 @@
           <a:lstStyle xmlns:a="http://schemas.openxmlformats.org/drawingml/2006/main"/>
           <a:p xmlns:a="http://schemas.openxmlformats.org/drawingml/2006/main">
             <a:pPr algn="l">
-              <a:defRPr sz="1500" b="0">
+              <a:defRPr sz="1725" b="0">
                 <a:solidFill>
                   <a:srgbClr val="17253A"/>
                 </a:solidFill>
@@ -8537,7 +8541,7 @@
               </a:defRPr>
             </a:pPr>
             <a:r>
-              <a:rPr sz="1500" b="0">
+              <a:rPr sz="1725" b="0">
                 <a:solidFill>
                   <a:srgbClr val="17253A"/>
                 </a:solidFill>
@@ -8545,7 +8549,7 @@
                 <a:ea typeface="Arial"/>
                 <a:cs typeface="Arial"/>
               </a:rPr>
-              <a:t>Set up the method: Show a complete calculation with precise vocabulary.</a:t>
+              <a:t>Divide both parts by 15 → 3 : 4</a:t>
             </a:r>
           </a:p>
         </p:txBody>
@@ -8555,28 +8559,30 @@
           <p:cNvPr id="17" name="">
             <a:extLst xmlns:a="http://schemas.openxmlformats.org/drawingml/2006/main">
               <a:ext uri="{FF2B5EF4-FFF2-40B4-BE49-F238E27FC236}">
-                <a16:creationId xmlns:a16="http://schemas.microsoft.com/office/drawing/2014/main" id="{D5465F1D-22A3-4F9F-BA72-3C68C37B2215}"/>
-              </a:ext>
-            </a:extLst>
-          </p:cNvPr>
-          <p:cNvSpPr>
-            <a:spLocks xmlns:a="http://schemas.openxmlformats.org/drawingml/2006/main" noGrp="1"/>
-          </p:cNvSpPr>
-          <p:nvPr/>
-        </p:nvSpPr>
-        <p:spPr>
-          <a:xfrm xmlns:a="http://schemas.openxmlformats.org/drawingml/2006/main">
-            <a:off x="1000125" y="3733800"/>
-            <a:ext cx="476250" cy="476250"/>
-          </a:xfrm>
-          <a:prstGeom xmlns:a="http://schemas.openxmlformats.org/drawingml/2006/main" prst="ellipse">
+                <a16:creationId xmlns:a16="http://schemas.microsoft.com/office/drawing/2014/main" id="{1C64B5AC-4615-420A-940F-827E57AD249E}"/>
+              </a:ext>
+            </a:extLst>
+          </p:cNvPr>
+          <p:cNvSpPr>
+            <a:spLocks xmlns:a="http://schemas.openxmlformats.org/drawingml/2006/main" noGrp="1"/>
+          </p:cNvSpPr>
+          <p:nvPr/>
+        </p:nvSpPr>
+        <p:spPr>
+          <a:xfrm xmlns:a="http://schemas.openxmlformats.org/drawingml/2006/main">
+            <a:off x="1714500" y="3819525"/>
+            <a:ext cx="9334500" cy="9525"/>
+          </a:xfrm>
+          <a:prstGeom xmlns:a="http://schemas.openxmlformats.org/drawingml/2006/main" prst="rect">
             <a:avLst/>
           </a:prstGeom>
           <a:solidFill xmlns:a="http://schemas.openxmlformats.org/drawingml/2006/main">
-            <a:srgbClr val="2C6E73"/>
+            <a:srgbClr val="D9E0E6"/>
           </a:solidFill>
           <a:ln xmlns:a="http://schemas.openxmlformats.org/drawingml/2006/main" w="0">
-            <a:noFill/>
+            <a:solidFill>
+              <a:srgbClr val="D9E0E6"/>
+            </a:solidFill>
           </a:ln>
         </p:spPr>
       </p:sp>
@@ -8585,19 +8591,19 @@
           <p:cNvPr id="18" name="">
             <a:extLst xmlns:a="http://schemas.openxmlformats.org/drawingml/2006/main">
               <a:ext uri="{FF2B5EF4-FFF2-40B4-BE49-F238E27FC236}">
-                <a16:creationId xmlns:a16="http://schemas.microsoft.com/office/drawing/2014/main" id="{85CD1C8D-8ABF-49A8-AA14-AC4EAC4F6F79}"/>
-              </a:ext>
-            </a:extLst>
-          </p:cNvPr>
-          <p:cNvSpPr>
-            <a:spLocks xmlns:a="http://schemas.openxmlformats.org/drawingml/2006/main" noGrp="1"/>
-          </p:cNvSpPr>
-          <p:nvPr/>
-        </p:nvSpPr>
-        <p:spPr>
-          <a:xfrm xmlns:a="http://schemas.openxmlformats.org/drawingml/2006/main">
-            <a:off x="1000125" y="3762375"/>
-            <a:ext cx="476250" cy="419100"/>
+                <a16:creationId xmlns:a16="http://schemas.microsoft.com/office/drawing/2014/main" id="{604A8511-3EDB-4C8B-843E-D396213C8AE6}"/>
+              </a:ext>
+            </a:extLst>
+          </p:cNvPr>
+          <p:cNvSpPr>
+            <a:spLocks xmlns:a="http://schemas.openxmlformats.org/drawingml/2006/main" noGrp="1"/>
+          </p:cNvSpPr>
+          <p:nvPr/>
+        </p:nvSpPr>
+        <p:spPr>
+          <a:xfrm xmlns:a="http://schemas.openxmlformats.org/drawingml/2006/main">
+            <a:off x="1162050" y="3952875"/>
+            <a:ext cx="400050" cy="400050"/>
           </a:xfrm>
           <a:prstGeom xmlns:a="http://schemas.openxmlformats.org/drawingml/2006/main" prst="rect">
             <a:avLst/>
@@ -8614,9 +8620,9 @@
           <a:lstStyle xmlns:a="http://schemas.openxmlformats.org/drawingml/2006/main"/>
           <a:p xmlns:a="http://schemas.openxmlformats.org/drawingml/2006/main">
             <a:pPr algn="ctr">
-              <a:defRPr sz="1350" b="1">
-                <a:solidFill>
-                  <a:srgbClr val="FFFFFF"/>
+              <a:defRPr sz="1125" b="1">
+                <a:solidFill>
+                  <a:srgbClr val="2C6E73"/>
                 </a:solidFill>
                 <a:latin typeface="Arial"/>
                 <a:ea typeface="Arial"/>
@@ -8624,9 +8630,9 @@
               </a:defRPr>
             </a:pPr>
             <a:r>
-              <a:rPr sz="1350" b="1">
-                <a:solidFill>
-                  <a:srgbClr val="FFFFFF"/>
+              <a:rPr sz="1125" b="1">
+                <a:solidFill>
+                  <a:srgbClr val="2C6E73"/>
                 </a:solidFill>
                 <a:latin typeface="Arial"/>
                 <a:ea typeface="Arial"/>
@@ -8642,19 +8648,19 @@
           <p:cNvPr id="19" name="">
             <a:extLst xmlns:a="http://schemas.openxmlformats.org/drawingml/2006/main">
               <a:ext uri="{FF2B5EF4-FFF2-40B4-BE49-F238E27FC236}">
-                <a16:creationId xmlns:a16="http://schemas.microsoft.com/office/drawing/2014/main" id="{C8034838-301F-4814-9285-142AF095BBA9}"/>
-              </a:ext>
-            </a:extLst>
-          </p:cNvPr>
-          <p:cNvSpPr>
-            <a:spLocks xmlns:a="http://schemas.openxmlformats.org/drawingml/2006/main" noGrp="1"/>
-          </p:cNvSpPr>
-          <p:nvPr/>
-        </p:nvSpPr>
-        <p:spPr>
-          <a:xfrm xmlns:a="http://schemas.openxmlformats.org/drawingml/2006/main">
-            <a:off x="1714500" y="3667125"/>
-            <a:ext cx="9429750" cy="609600"/>
+                <a16:creationId xmlns:a16="http://schemas.microsoft.com/office/drawing/2014/main" id="{E76577C2-F5BF-4DB1-9EEE-0C6C70C69440}"/>
+              </a:ext>
+            </a:extLst>
+          </p:cNvPr>
+          <p:cNvSpPr>
+            <a:spLocks xmlns:a="http://schemas.openxmlformats.org/drawingml/2006/main" noGrp="1"/>
+          </p:cNvSpPr>
+          <p:nvPr/>
+        </p:nvSpPr>
+        <p:spPr>
+          <a:xfrm xmlns:a="http://schemas.openxmlformats.org/drawingml/2006/main">
+            <a:off x="1714500" y="3867150"/>
+            <a:ext cx="9525000" cy="809625"/>
           </a:xfrm>
           <a:prstGeom xmlns:a="http://schemas.openxmlformats.org/drawingml/2006/main" prst="rect">
             <a:avLst/>
@@ -8671,7 +8677,7 @@
           <a:lstStyle xmlns:a="http://schemas.openxmlformats.org/drawingml/2006/main"/>
           <a:p xmlns:a="http://schemas.openxmlformats.org/drawingml/2006/main">
             <a:pPr algn="l">
-              <a:defRPr sz="1500" b="0">
+              <a:defRPr sz="1725" b="0">
                 <a:solidFill>
                   <a:srgbClr val="17253A"/>
                 </a:solidFill>
@@ -8681,7 +8687,7 @@
               </a:defRPr>
             </a:pPr>
             <a:r>
-              <a:rPr sz="1500" b="0">
+              <a:rPr sz="1725" b="0">
                 <a:solidFill>
                   <a:srgbClr val="17253A"/>
                 </a:solidFill>
@@ -8689,7 +8695,7 @@
                 <a:ea typeface="Arial"/>
                 <a:cs typeface="Arial"/>
               </a:rPr>
-              <a:t>Complete the calculation: 3:4 and 12:16.</a:t>
+              <a:t>To make first part 12, multiply by 4</a:t>
             </a:r>
           </a:p>
         </p:txBody>
@@ -8699,28 +8705,30 @@
           <p:cNvPr id="20" name="">
             <a:extLst xmlns:a="http://schemas.openxmlformats.org/drawingml/2006/main">
               <a:ext uri="{FF2B5EF4-FFF2-40B4-BE49-F238E27FC236}">
-                <a16:creationId xmlns:a16="http://schemas.microsoft.com/office/drawing/2014/main" id="{D99CC74C-4CFF-4128-A62F-C9605C3EE23A}"/>
-              </a:ext>
-            </a:extLst>
-          </p:cNvPr>
-          <p:cNvSpPr>
-            <a:spLocks xmlns:a="http://schemas.openxmlformats.org/drawingml/2006/main" noGrp="1"/>
-          </p:cNvSpPr>
-          <p:nvPr/>
-        </p:nvSpPr>
-        <p:spPr>
-          <a:xfrm xmlns:a="http://schemas.openxmlformats.org/drawingml/2006/main">
-            <a:off x="1000125" y="4476750"/>
-            <a:ext cx="476250" cy="476250"/>
-          </a:xfrm>
-          <a:prstGeom xmlns:a="http://schemas.openxmlformats.org/drawingml/2006/main" prst="ellipse">
+                <a16:creationId xmlns:a16="http://schemas.microsoft.com/office/drawing/2014/main" id="{664C07BF-8DFB-4663-9230-D60FB3038073}"/>
+              </a:ext>
+            </a:extLst>
+          </p:cNvPr>
+          <p:cNvSpPr>
+            <a:spLocks xmlns:a="http://schemas.openxmlformats.org/drawingml/2006/main" noGrp="1"/>
+          </p:cNvSpPr>
+          <p:nvPr/>
+        </p:nvSpPr>
+        <p:spPr>
+          <a:xfrm xmlns:a="http://schemas.openxmlformats.org/drawingml/2006/main">
+            <a:off x="1714500" y="4695825"/>
+            <a:ext cx="9334500" cy="9525"/>
+          </a:xfrm>
+          <a:prstGeom xmlns:a="http://schemas.openxmlformats.org/drawingml/2006/main" prst="rect">
             <a:avLst/>
           </a:prstGeom>
           <a:solidFill xmlns:a="http://schemas.openxmlformats.org/drawingml/2006/main">
-            <a:srgbClr val="2C6E73"/>
+            <a:srgbClr val="D9E0E6"/>
           </a:solidFill>
           <a:ln xmlns:a="http://schemas.openxmlformats.org/drawingml/2006/main" w="0">
-            <a:noFill/>
+            <a:solidFill>
+              <a:srgbClr val="D9E0E6"/>
+            </a:solidFill>
           </a:ln>
         </p:spPr>
       </p:sp>
@@ -8729,19 +8737,19 @@
           <p:cNvPr id="21" name="">
             <a:extLst xmlns:a="http://schemas.openxmlformats.org/drawingml/2006/main">
               <a:ext uri="{FF2B5EF4-FFF2-40B4-BE49-F238E27FC236}">
-                <a16:creationId xmlns:a16="http://schemas.microsoft.com/office/drawing/2014/main" id="{D8221BF6-5251-400B-8D11-B6E53537ABB3}"/>
-              </a:ext>
-            </a:extLst>
-          </p:cNvPr>
-          <p:cNvSpPr>
-            <a:spLocks xmlns:a="http://schemas.openxmlformats.org/drawingml/2006/main" noGrp="1"/>
-          </p:cNvSpPr>
-          <p:nvPr/>
-        </p:nvSpPr>
-        <p:spPr>
-          <a:xfrm xmlns:a="http://schemas.openxmlformats.org/drawingml/2006/main">
-            <a:off x="1000125" y="4505325"/>
-            <a:ext cx="476250" cy="419100"/>
+                <a16:creationId xmlns:a16="http://schemas.microsoft.com/office/drawing/2014/main" id="{3C0B1020-6651-4C03-AFD0-9E43307AF41F}"/>
+              </a:ext>
+            </a:extLst>
+          </p:cNvPr>
+          <p:cNvSpPr>
+            <a:spLocks xmlns:a="http://schemas.openxmlformats.org/drawingml/2006/main" noGrp="1"/>
+          </p:cNvSpPr>
+          <p:nvPr/>
+        </p:nvSpPr>
+        <p:spPr>
+          <a:xfrm xmlns:a="http://schemas.openxmlformats.org/drawingml/2006/main">
+            <a:off x="1162050" y="4829175"/>
+            <a:ext cx="400050" cy="400050"/>
           </a:xfrm>
           <a:prstGeom xmlns:a="http://schemas.openxmlformats.org/drawingml/2006/main" prst="rect">
             <a:avLst/>
@@ -8758,9 +8766,9 @@
           <a:lstStyle xmlns:a="http://schemas.openxmlformats.org/drawingml/2006/main"/>
           <a:p xmlns:a="http://schemas.openxmlformats.org/drawingml/2006/main">
             <a:pPr algn="ctr">
-              <a:defRPr sz="1350" b="1">
-                <a:solidFill>
-                  <a:srgbClr val="FFFFFF"/>
+              <a:defRPr sz="1125" b="1">
+                <a:solidFill>
+                  <a:srgbClr val="2F785D"/>
                 </a:solidFill>
                 <a:latin typeface="Arial"/>
                 <a:ea typeface="Arial"/>
@@ -8768,9 +8776,9 @@
               </a:defRPr>
             </a:pPr>
             <a:r>
-              <a:rPr sz="1350" b="1">
-                <a:solidFill>
-                  <a:srgbClr val="FFFFFF"/>
+              <a:rPr sz="1125" b="1">
+                <a:solidFill>
+                  <a:srgbClr val="2F785D"/>
                 </a:solidFill>
                 <a:latin typeface="Arial"/>
                 <a:ea typeface="Arial"/>
@@ -8786,19 +8794,19 @@
           <p:cNvPr id="22" name="">
             <a:extLst xmlns:a="http://schemas.openxmlformats.org/drawingml/2006/main">
               <a:ext uri="{FF2B5EF4-FFF2-40B4-BE49-F238E27FC236}">
-                <a16:creationId xmlns:a16="http://schemas.microsoft.com/office/drawing/2014/main" id="{C8E45061-5298-4A69-A010-7BCB04951D92}"/>
-              </a:ext>
-            </a:extLst>
-          </p:cNvPr>
-          <p:cNvSpPr>
-            <a:spLocks xmlns:a="http://schemas.openxmlformats.org/drawingml/2006/main" noGrp="1"/>
-          </p:cNvSpPr>
-          <p:nvPr/>
-        </p:nvSpPr>
-        <p:spPr>
-          <a:xfrm xmlns:a="http://schemas.openxmlformats.org/drawingml/2006/main">
-            <a:off x="1714500" y="4410075"/>
-            <a:ext cx="9429750" cy="609600"/>
+                <a16:creationId xmlns:a16="http://schemas.microsoft.com/office/drawing/2014/main" id="{366DEB2B-8309-45F7-A727-A599A4305D52}"/>
+              </a:ext>
+            </a:extLst>
+          </p:cNvPr>
+          <p:cNvSpPr>
+            <a:spLocks xmlns:a="http://schemas.openxmlformats.org/drawingml/2006/main" noGrp="1"/>
+          </p:cNvSpPr>
+          <p:nvPr/>
+        </p:nvSpPr>
+        <p:spPr>
+          <a:xfrm xmlns:a="http://schemas.openxmlformats.org/drawingml/2006/main">
+            <a:off x="1714500" y="4743450"/>
+            <a:ext cx="9525000" cy="809625"/>
           </a:xfrm>
           <a:prstGeom xmlns:a="http://schemas.openxmlformats.org/drawingml/2006/main" prst="rect">
             <a:avLst/>
@@ -8815,7 +8823,7 @@
           <a:lstStyle xmlns:a="http://schemas.openxmlformats.org/drawingml/2006/main"/>
           <a:p xmlns:a="http://schemas.openxmlformats.org/drawingml/2006/main">
             <a:pPr algn="l">
-              <a:defRPr sz="1500" b="1">
+              <a:defRPr sz="1725" b="1">
                 <a:solidFill>
                   <a:srgbClr val="2F785D"/>
                 </a:solidFill>
@@ -8825,7 +8833,7 @@
               </a:defRPr>
             </a:pPr>
             <a:r>
-              <a:rPr sz="1500" b="1">
+              <a:rPr sz="1725" b="1">
                 <a:solidFill>
                   <a:srgbClr val="2F785D"/>
                 </a:solidFill>
@@ -8833,7 +8841,7 @@
                 <a:ea typeface="Arial"/>
                 <a:cs typeface="Arial"/>
               </a:rPr>
-              <a:t>Check the result: Check the result and record a specific next step.</a:t>
+              <a:t>3 : 4 = 12 : 16</a:t>
             </a:r>
           </a:p>
         </p:txBody>
@@ -8841,7 +8849,7 @@
     </p:spTree>
     <p:extLst>
       <p:ext uri="{BB962C8B-B14F-4D97-AF65-F5344CB8AC3E}">
-        <p14:creationId xmlns:p14="http://schemas.microsoft.com/office/powerpoint/2010/main" val="161242182"/>
+        <p14:creationId xmlns:p14="http://schemas.microsoft.com/office/powerpoint/2010/main" val="991140541"/>
       </p:ext>
     </p:extLst>
   </p:cSld>
@@ -9134,7 +9142,7 @@
           <p:cNvPr id="15" name="">
             <a:extLst xmlns:a="http://schemas.openxmlformats.org/drawingml/2006/main">
               <a:ext uri="{FF2B5EF4-FFF2-40B4-BE49-F238E27FC236}">
-                <a16:creationId xmlns:a16="http://schemas.microsoft.com/office/drawing/2014/main" id="{F7C03193-DE45-45A8-B5AF-6575FB3C2729}"/>
+                <a16:creationId xmlns:a16="http://schemas.microsoft.com/office/drawing/2014/main" id="{7E5D5F93-253F-4478-8B95-CC13FD3FFE53}"/>
               </a:ext>
             </a:extLst>
           </p:cNvPr>
@@ -9166,7 +9174,7 @@
           <p:cNvPr id="2" name="">
             <a:extLst xmlns:a="http://schemas.openxmlformats.org/drawingml/2006/main">
               <a:ext uri="{FF2B5EF4-FFF2-40B4-BE49-F238E27FC236}">
-                <a16:creationId xmlns:a16="http://schemas.microsoft.com/office/drawing/2014/main" id="{B0530BC2-D068-4105-98B0-EF2F6E02BEE9}"/>
+                <a16:creationId xmlns:a16="http://schemas.microsoft.com/office/drawing/2014/main" id="{F465A096-1454-4EA3-86EB-630C8834D193}"/>
               </a:ext>
             </a:extLst>
           </p:cNvPr>
@@ -9223,7 +9231,7 @@
           <p:cNvPr id="3" name="">
             <a:extLst xmlns:a="http://schemas.openxmlformats.org/drawingml/2006/main">
               <a:ext uri="{FF2B5EF4-FFF2-40B4-BE49-F238E27FC236}">
-                <a16:creationId xmlns:a16="http://schemas.microsoft.com/office/drawing/2014/main" id="{2E9C1D9C-92FE-4409-924A-C8D23409EFF4}"/>
+                <a16:creationId xmlns:a16="http://schemas.microsoft.com/office/drawing/2014/main" id="{0EED6665-7B37-4288-B5F8-3885754A57C1}"/>
               </a:ext>
             </a:extLst>
           </p:cNvPr>
@@ -9255,7 +9263,7 @@
           <p:cNvPr id="4" name="">
             <a:extLst xmlns:a="http://schemas.openxmlformats.org/drawingml/2006/main">
               <a:ext uri="{FF2B5EF4-FFF2-40B4-BE49-F238E27FC236}">
-                <a16:creationId xmlns:a16="http://schemas.microsoft.com/office/drawing/2014/main" id="{CEFBBA7F-2455-4439-83C4-88ADD761776C}"/>
+                <a16:creationId xmlns:a16="http://schemas.microsoft.com/office/drawing/2014/main" id="{E887BF91-219C-4978-ADF0-EADF5066FF56}"/>
               </a:ext>
             </a:extLst>
           </p:cNvPr>
@@ -9312,7 +9320,7 @@
           <p:cNvPr id="5" name="">
             <a:extLst xmlns:a="http://schemas.openxmlformats.org/drawingml/2006/main">
               <a:ext uri="{FF2B5EF4-FFF2-40B4-BE49-F238E27FC236}">
-                <a16:creationId xmlns:a16="http://schemas.microsoft.com/office/drawing/2014/main" id="{E72AD000-C943-4DB9-A578-44889274B7B0}"/>
+                <a16:creationId xmlns:a16="http://schemas.microsoft.com/office/drawing/2014/main" id="{878A0C4E-5CE0-41A5-A419-00E0A599A857}"/>
               </a:ext>
             </a:extLst>
           </p:cNvPr>
@@ -9369,7 +9377,7 @@
           <p:cNvPr id="6" name="">
             <a:extLst xmlns:a="http://schemas.openxmlformats.org/drawingml/2006/main">
               <a:ext uri="{FF2B5EF4-FFF2-40B4-BE49-F238E27FC236}">
-                <a16:creationId xmlns:a16="http://schemas.microsoft.com/office/drawing/2014/main" id="{4BEF1A70-43DA-4A6C-B1CD-A7BBCE9DF50E}"/>
+                <a16:creationId xmlns:a16="http://schemas.microsoft.com/office/drawing/2014/main" id="{B4CD0A0F-60EC-49F1-B2AF-7D20A2067BD5}"/>
               </a:ext>
             </a:extLst>
           </p:cNvPr>
@@ -9426,7 +9434,7 @@
           <p:cNvPr id="7" name="">
             <a:extLst xmlns:a="http://schemas.openxmlformats.org/drawingml/2006/main">
               <a:ext uri="{FF2B5EF4-FFF2-40B4-BE49-F238E27FC236}">
-                <a16:creationId xmlns:a16="http://schemas.microsoft.com/office/drawing/2014/main" id="{D3B7E341-E204-446D-96C2-A373159A6A1F}"/>
+                <a16:creationId xmlns:a16="http://schemas.microsoft.com/office/drawing/2014/main" id="{C4A270D6-4D5F-4175-BB14-E1FDD78D7D0D}"/>
               </a:ext>
             </a:extLst>
           </p:cNvPr>
@@ -9458,7 +9466,7 @@
           <p:cNvPr id="8" name="">
             <a:extLst xmlns:a="http://schemas.openxmlformats.org/drawingml/2006/main">
               <a:ext uri="{FF2B5EF4-FFF2-40B4-BE49-F238E27FC236}">
-                <a16:creationId xmlns:a16="http://schemas.microsoft.com/office/drawing/2014/main" id="{98C4169B-7555-4CD4-9840-8DEECBDC7070}"/>
+                <a16:creationId xmlns:a16="http://schemas.microsoft.com/office/drawing/2014/main" id="{33F4052B-5E64-4363-9564-A7836D76DF82}"/>
               </a:ext>
             </a:extLst>
           </p:cNvPr>
@@ -9515,7 +9523,7 @@
           <p:cNvPr id="9" name="">
             <a:extLst xmlns:a="http://schemas.openxmlformats.org/drawingml/2006/main">
               <a:ext uri="{FF2B5EF4-FFF2-40B4-BE49-F238E27FC236}">
-                <a16:creationId xmlns:a16="http://schemas.microsoft.com/office/drawing/2014/main" id="{181D5283-9383-425D-B910-E72E517F837C}"/>
+                <a16:creationId xmlns:a16="http://schemas.microsoft.com/office/drawing/2014/main" id="{AE0E5875-788C-43A0-BF18-CF12944EBE0D}"/>
               </a:ext>
             </a:extLst>
           </p:cNvPr>
@@ -9572,7 +9580,7 @@
           <p:cNvPr id="10" name="">
             <a:extLst xmlns:a="http://schemas.openxmlformats.org/drawingml/2006/main">
               <a:ext uri="{FF2B5EF4-FFF2-40B4-BE49-F238E27FC236}">
-                <a16:creationId xmlns:a16="http://schemas.microsoft.com/office/drawing/2014/main" id="{78E1C559-AEBA-4EF5-A1AF-94E0B93438A8}"/>
+                <a16:creationId xmlns:a16="http://schemas.microsoft.com/office/drawing/2014/main" id="{F050DB0A-8471-4065-8FCC-EEF51A893E4B}"/>
               </a:ext>
             </a:extLst>
           </p:cNvPr>
@@ -9629,7 +9637,7 @@
           <p:cNvPr id="11" name="">
             <a:extLst xmlns:a="http://schemas.openxmlformats.org/drawingml/2006/main">
               <a:ext uri="{FF2B5EF4-FFF2-40B4-BE49-F238E27FC236}">
-                <a16:creationId xmlns:a16="http://schemas.microsoft.com/office/drawing/2014/main" id="{021C3817-BC15-47DE-954E-DC609C55CB1B}"/>
+                <a16:creationId xmlns:a16="http://schemas.microsoft.com/office/drawing/2014/main" id="{E310758B-18AC-4B50-8654-AD3C4B1FBA27}"/>
               </a:ext>
             </a:extLst>
           </p:cNvPr>
@@ -9686,7 +9694,7 @@
           <p:cNvPr id="12" name="">
             <a:extLst xmlns:a="http://schemas.openxmlformats.org/drawingml/2006/main">
               <a:ext uri="{FF2B5EF4-FFF2-40B4-BE49-F238E27FC236}">
-                <a16:creationId xmlns:a16="http://schemas.microsoft.com/office/drawing/2014/main" id="{A827D00A-38C4-4920-B9C3-1CF470B23266}"/>
+                <a16:creationId xmlns:a16="http://schemas.microsoft.com/office/drawing/2014/main" id="{4FA8682B-FFFF-4061-A79C-CF4B5601C1DE}"/>
               </a:ext>
             </a:extLst>
           </p:cNvPr>
@@ -9718,7 +9726,7 @@
           <p:cNvPr id="13" name="">
             <a:extLst xmlns:a="http://schemas.openxmlformats.org/drawingml/2006/main">
               <a:ext uri="{FF2B5EF4-FFF2-40B4-BE49-F238E27FC236}">
-                <a16:creationId xmlns:a16="http://schemas.microsoft.com/office/drawing/2014/main" id="{A7D7430B-FCD7-4200-BCA3-A838AB053959}"/>
+                <a16:creationId xmlns:a16="http://schemas.microsoft.com/office/drawing/2014/main" id="{63952C9E-AC8D-4D09-8386-774806D2E95C}"/>
               </a:ext>
             </a:extLst>
           </p:cNvPr>
@@ -9775,7 +9783,7 @@
           <p:cNvPr id="14" name="">
             <a:extLst xmlns:a="http://schemas.openxmlformats.org/drawingml/2006/main">
               <a:ext uri="{FF2B5EF4-FFF2-40B4-BE49-F238E27FC236}">
-                <a16:creationId xmlns:a16="http://schemas.microsoft.com/office/drawing/2014/main" id="{115DD241-D06D-48B1-9332-A15D78BC6D04}"/>
+                <a16:creationId xmlns:a16="http://schemas.microsoft.com/office/drawing/2014/main" id="{B9D760EB-AB7C-47FE-AAE2-F145E99016E2}"/>
               </a:ext>
             </a:extLst>
           </p:cNvPr>
@@ -9830,7 +9838,7 @@
     </p:spTree>
     <p:extLst>
       <p:ext uri="{BB962C8B-B14F-4D97-AF65-F5344CB8AC3E}">
-        <p14:creationId xmlns:p14="http://schemas.microsoft.com/office/powerpoint/2010/main" val="1734398754"/>
+        <p14:creationId xmlns:p14="http://schemas.microsoft.com/office/powerpoint/2010/main" val="1857195163"/>
       </p:ext>
     </p:extLst>
   </p:cSld>
@@ -10031,7 +10039,7 @@
           <p:cNvPr id="16" name="">
             <a:extLst xmlns:a="http://schemas.openxmlformats.org/drawingml/2006/main">
               <a:ext uri="{FF2B5EF4-FFF2-40B4-BE49-F238E27FC236}">
-                <a16:creationId xmlns:a16="http://schemas.microsoft.com/office/drawing/2014/main" id="{5FB8849D-6AF0-4CD2-8563-338125B57468}"/>
+                <a16:creationId xmlns:a16="http://schemas.microsoft.com/office/drawing/2014/main" id="{82C7253F-899C-44FE-AA83-D579FDE5AF08}"/>
               </a:ext>
             </a:extLst>
           </p:cNvPr>
@@ -10063,7 +10071,7 @@
           <p:cNvPr id="2" name="">
             <a:extLst xmlns:a="http://schemas.openxmlformats.org/drawingml/2006/main">
               <a:ext uri="{FF2B5EF4-FFF2-40B4-BE49-F238E27FC236}">
-                <a16:creationId xmlns:a16="http://schemas.microsoft.com/office/drawing/2014/main" id="{661B3AB7-4797-4766-BFAD-6898E8AFCC6D}"/>
+                <a16:creationId xmlns:a16="http://schemas.microsoft.com/office/drawing/2014/main" id="{BD54D585-F198-4F03-BD14-9C0C3B14DC7C}"/>
               </a:ext>
             </a:extLst>
           </p:cNvPr>
@@ -10120,7 +10128,7 @@
           <p:cNvPr id="3" name="">
             <a:extLst xmlns:a="http://schemas.openxmlformats.org/drawingml/2006/main">
               <a:ext uri="{FF2B5EF4-FFF2-40B4-BE49-F238E27FC236}">
-                <a16:creationId xmlns:a16="http://schemas.microsoft.com/office/drawing/2014/main" id="{DE9ED2AD-6697-41CF-8A06-44B4DEE91168}"/>
+                <a16:creationId xmlns:a16="http://schemas.microsoft.com/office/drawing/2014/main" id="{C9800D06-B468-47DC-B60F-361E6607EBCE}"/>
               </a:ext>
             </a:extLst>
           </p:cNvPr>
@@ -10152,7 +10160,7 @@
           <p:cNvPr id="4" name="">
             <a:extLst xmlns:a="http://schemas.openxmlformats.org/drawingml/2006/main">
               <a:ext uri="{FF2B5EF4-FFF2-40B4-BE49-F238E27FC236}">
-                <a16:creationId xmlns:a16="http://schemas.microsoft.com/office/drawing/2014/main" id="{84E8A89F-0146-4AF4-8686-688CB6DD4F0F}"/>
+                <a16:creationId xmlns:a16="http://schemas.microsoft.com/office/drawing/2014/main" id="{9C334FCD-E94A-44FA-8A29-F765ED6F7520}"/>
               </a:ext>
             </a:extLst>
           </p:cNvPr>
@@ -10209,7 +10217,7 @@
           <p:cNvPr id="5" name="">
             <a:extLst xmlns:a="http://schemas.openxmlformats.org/drawingml/2006/main">
               <a:ext uri="{FF2B5EF4-FFF2-40B4-BE49-F238E27FC236}">
-                <a16:creationId xmlns:a16="http://schemas.microsoft.com/office/drawing/2014/main" id="{9C22804F-E9B3-44A0-9138-E393A7B78E47}"/>
+                <a16:creationId xmlns:a16="http://schemas.microsoft.com/office/drawing/2014/main" id="{651C8353-F384-4E6F-B93B-AF7275E2B721}"/>
               </a:ext>
             </a:extLst>
           </p:cNvPr>
@@ -10266,7 +10274,7 @@
           <p:cNvPr id="6" name="">
             <a:extLst xmlns:a="http://schemas.openxmlformats.org/drawingml/2006/main">
               <a:ext uri="{FF2B5EF4-FFF2-40B4-BE49-F238E27FC236}">
-                <a16:creationId xmlns:a16="http://schemas.microsoft.com/office/drawing/2014/main" id="{5EF5107D-D24E-49A1-B053-E0D5FD244ACD}"/>
+                <a16:creationId xmlns:a16="http://schemas.microsoft.com/office/drawing/2014/main" id="{C736A579-0B14-4329-A576-7FC94D040D1A}"/>
               </a:ext>
             </a:extLst>
           </p:cNvPr>
@@ -10323,7 +10331,7 @@
           <p:cNvPr id="7" name="">
             <a:extLst xmlns:a="http://schemas.openxmlformats.org/drawingml/2006/main">
               <a:ext uri="{FF2B5EF4-FFF2-40B4-BE49-F238E27FC236}">
-                <a16:creationId xmlns:a16="http://schemas.microsoft.com/office/drawing/2014/main" id="{4B2D1032-99E1-44CE-BC2D-AE420CB73B51}"/>
+                <a16:creationId xmlns:a16="http://schemas.microsoft.com/office/drawing/2014/main" id="{39B6AC38-3A77-4B41-B770-43B3E29A8B83}"/>
               </a:ext>
             </a:extLst>
           </p:cNvPr>
@@ -10355,7 +10363,7 @@
           <p:cNvPr id="8" name="">
             <a:extLst xmlns:a="http://schemas.openxmlformats.org/drawingml/2006/main">
               <a:ext uri="{FF2B5EF4-FFF2-40B4-BE49-F238E27FC236}">
-                <a16:creationId xmlns:a16="http://schemas.microsoft.com/office/drawing/2014/main" id="{A82762A4-6D52-451A-BC95-BC57E1C4CE40}"/>
+                <a16:creationId xmlns:a16="http://schemas.microsoft.com/office/drawing/2014/main" id="{662E6D2D-9293-43DB-A839-82EF120A77B8}"/>
               </a:ext>
             </a:extLst>
           </p:cNvPr>
@@ -10412,7 +10420,7 @@
           <p:cNvPr id="9" name="">
             <a:extLst xmlns:a="http://schemas.openxmlformats.org/drawingml/2006/main">
               <a:ext uri="{FF2B5EF4-FFF2-40B4-BE49-F238E27FC236}">
-                <a16:creationId xmlns:a16="http://schemas.microsoft.com/office/drawing/2014/main" id="{09869605-2F79-40D8-A7F6-332C8CF5B41C}"/>
+                <a16:creationId xmlns:a16="http://schemas.microsoft.com/office/drawing/2014/main" id="{832BD2F6-A87E-4A8D-A089-8FDF3226ACBC}"/>
               </a:ext>
             </a:extLst>
           </p:cNvPr>
@@ -10469,7 +10477,7 @@
           <p:cNvPr id="10" name="">
             <a:extLst xmlns:a="http://schemas.openxmlformats.org/drawingml/2006/main">
               <a:ext uri="{FF2B5EF4-FFF2-40B4-BE49-F238E27FC236}">
-                <a16:creationId xmlns:a16="http://schemas.microsoft.com/office/drawing/2014/main" id="{BC35A414-CF5E-4371-99B5-3B4760B049E4}"/>
+                <a16:creationId xmlns:a16="http://schemas.microsoft.com/office/drawing/2014/main" id="{181A504A-7931-499A-910C-80ABDD806A1F}"/>
               </a:ext>
             </a:extLst>
           </p:cNvPr>
@@ -10526,7 +10534,7 @@
           <p:cNvPr id="11" name="">
             <a:extLst xmlns:a="http://schemas.openxmlformats.org/drawingml/2006/main">
               <a:ext uri="{FF2B5EF4-FFF2-40B4-BE49-F238E27FC236}">
-                <a16:creationId xmlns:a16="http://schemas.microsoft.com/office/drawing/2014/main" id="{71149DF5-780C-45DA-9DAE-AB3523DBB209}"/>
+                <a16:creationId xmlns:a16="http://schemas.microsoft.com/office/drawing/2014/main" id="{E04398FA-6A27-4483-82C8-F68D1535CE94}"/>
               </a:ext>
             </a:extLst>
           </p:cNvPr>
@@ -10583,7 +10591,7 @@
           <p:cNvPr id="12" name="">
             <a:extLst xmlns:a="http://schemas.openxmlformats.org/drawingml/2006/main">
               <a:ext uri="{FF2B5EF4-FFF2-40B4-BE49-F238E27FC236}">
-                <a16:creationId xmlns:a16="http://schemas.microsoft.com/office/drawing/2014/main" id="{1EECF627-78B6-4691-BC64-23A7D5E59F60}"/>
+                <a16:creationId xmlns:a16="http://schemas.microsoft.com/office/drawing/2014/main" id="{DA007F17-3D5B-4C33-A1AE-EB2B2AFF1495}"/>
               </a:ext>
             </a:extLst>
           </p:cNvPr>
@@ -10640,7 +10648,7 @@
           <p:cNvPr id="13" name="">
             <a:extLst xmlns:a="http://schemas.openxmlformats.org/drawingml/2006/main">
               <a:ext uri="{FF2B5EF4-FFF2-40B4-BE49-F238E27FC236}">
-                <a16:creationId xmlns:a16="http://schemas.microsoft.com/office/drawing/2014/main" id="{DA16DEA5-A62A-400E-BB3D-333F79D5205E}"/>
+                <a16:creationId xmlns:a16="http://schemas.microsoft.com/office/drawing/2014/main" id="{7C87FA0E-6CA2-449E-8B1D-4753850873BE}"/>
               </a:ext>
             </a:extLst>
           </p:cNvPr>
@@ -10697,7 +10705,7 @@
           <p:cNvPr id="14" name="">
             <a:extLst xmlns:a="http://schemas.openxmlformats.org/drawingml/2006/main">
               <a:ext uri="{FF2B5EF4-FFF2-40B4-BE49-F238E27FC236}">
-                <a16:creationId xmlns:a16="http://schemas.microsoft.com/office/drawing/2014/main" id="{4A942709-1391-41E9-8442-C37454B159CF}"/>
+                <a16:creationId xmlns:a16="http://schemas.microsoft.com/office/drawing/2014/main" id="{03A80D17-97FE-48F1-ACCC-D4610B6FF3DB}"/>
               </a:ext>
             </a:extLst>
           </p:cNvPr>
@@ -10754,7 +10762,7 @@
           <p:cNvPr id="15" name="">
             <a:extLst xmlns:a="http://schemas.openxmlformats.org/drawingml/2006/main">
               <a:ext uri="{FF2B5EF4-FFF2-40B4-BE49-F238E27FC236}">
-                <a16:creationId xmlns:a16="http://schemas.microsoft.com/office/drawing/2014/main" id="{3082503D-17E4-468D-A85F-62921957191F}"/>
+                <a16:creationId xmlns:a16="http://schemas.microsoft.com/office/drawing/2014/main" id="{96EB1CD4-4964-4F10-A136-44DBBBDD7963}"/>
               </a:ext>
             </a:extLst>
           </p:cNvPr>
@@ -10809,7 +10817,7 @@
     </p:spTree>
     <p:extLst>
       <p:ext uri="{BB962C8B-B14F-4D97-AF65-F5344CB8AC3E}">
-        <p14:creationId xmlns:p14="http://schemas.microsoft.com/office/powerpoint/2010/main" val="670271377"/>
+        <p14:creationId xmlns:p14="http://schemas.microsoft.com/office/powerpoint/2010/main" val="547353834"/>
       </p:ext>
     </p:extLst>
   </p:cSld>
@@ -10964,7 +10972,7 @@
           <p:cNvPr id="16" name="">
             <a:extLst xmlns:a="http://schemas.openxmlformats.org/drawingml/2006/main">
               <a:ext uri="{FF2B5EF4-FFF2-40B4-BE49-F238E27FC236}">
-                <a16:creationId xmlns:a16="http://schemas.microsoft.com/office/drawing/2014/main" id="{39DB0C16-B5EC-49B3-9D64-4AC795668BE1}"/>
+                <a16:creationId xmlns:a16="http://schemas.microsoft.com/office/drawing/2014/main" id="{13B748AF-6C7D-4657-BD1F-54FD9F0BF688}"/>
               </a:ext>
             </a:extLst>
           </p:cNvPr>
@@ -10996,7 +11004,7 @@
           <p:cNvPr id="2" name="">
             <a:extLst xmlns:a="http://schemas.openxmlformats.org/drawingml/2006/main">
               <a:ext uri="{FF2B5EF4-FFF2-40B4-BE49-F238E27FC236}">
-                <a16:creationId xmlns:a16="http://schemas.microsoft.com/office/drawing/2014/main" id="{5BBBD85B-6C87-4303-8638-FEB62A43D037}"/>
+                <a16:creationId xmlns:a16="http://schemas.microsoft.com/office/drawing/2014/main" id="{87EA6BA8-CFE4-42AC-8155-037BF001926F}"/>
               </a:ext>
             </a:extLst>
           </p:cNvPr>
@@ -11053,7 +11061,7 @@
           <p:cNvPr id="3" name="">
             <a:extLst xmlns:a="http://schemas.openxmlformats.org/drawingml/2006/main">
               <a:ext uri="{FF2B5EF4-FFF2-40B4-BE49-F238E27FC236}">
-                <a16:creationId xmlns:a16="http://schemas.microsoft.com/office/drawing/2014/main" id="{0405950A-5575-4C1B-82F7-A4882CE1E1FE}"/>
+                <a16:creationId xmlns:a16="http://schemas.microsoft.com/office/drawing/2014/main" id="{9E87F883-C81F-4F5B-B2B0-103947F54CFB}"/>
               </a:ext>
             </a:extLst>
           </p:cNvPr>
@@ -11085,7 +11093,7 @@
           <p:cNvPr id="4" name="">
             <a:extLst xmlns:a="http://schemas.openxmlformats.org/drawingml/2006/main">
               <a:ext uri="{FF2B5EF4-FFF2-40B4-BE49-F238E27FC236}">
-                <a16:creationId xmlns:a16="http://schemas.microsoft.com/office/drawing/2014/main" id="{B76F2940-29D9-4E93-922C-73A5C5A978C4}"/>
+                <a16:creationId xmlns:a16="http://schemas.microsoft.com/office/drawing/2014/main" id="{10E36734-15C5-417B-AC4C-0AF5D3784471}"/>
               </a:ext>
             </a:extLst>
           </p:cNvPr>
@@ -11142,7 +11150,7 @@
           <p:cNvPr id="5" name="">
             <a:extLst xmlns:a="http://schemas.openxmlformats.org/drawingml/2006/main">
               <a:ext uri="{FF2B5EF4-FFF2-40B4-BE49-F238E27FC236}">
-                <a16:creationId xmlns:a16="http://schemas.microsoft.com/office/drawing/2014/main" id="{722BB7DC-7752-4BCB-BF1A-54B092157448}"/>
+                <a16:creationId xmlns:a16="http://schemas.microsoft.com/office/drawing/2014/main" id="{9E93A71F-324B-4BEF-B951-4AC3CA726C3B}"/>
               </a:ext>
             </a:extLst>
           </p:cNvPr>
@@ -11199,7 +11207,7 @@
           <p:cNvPr id="6" name="">
             <a:extLst xmlns:a="http://schemas.openxmlformats.org/drawingml/2006/main">
               <a:ext uri="{FF2B5EF4-FFF2-40B4-BE49-F238E27FC236}">
-                <a16:creationId xmlns:a16="http://schemas.microsoft.com/office/drawing/2014/main" id="{ACE43439-01DA-48CE-9E85-23278B89D588}"/>
+                <a16:creationId xmlns:a16="http://schemas.microsoft.com/office/drawing/2014/main" id="{EA55EECC-02F3-4283-B7C9-6DC97D1D7540}"/>
               </a:ext>
             </a:extLst>
           </p:cNvPr>
@@ -11256,7 +11264,7 @@
           <p:cNvPr id="7" name="">
             <a:extLst xmlns:a="http://schemas.openxmlformats.org/drawingml/2006/main">
               <a:ext uri="{FF2B5EF4-FFF2-40B4-BE49-F238E27FC236}">
-                <a16:creationId xmlns:a16="http://schemas.microsoft.com/office/drawing/2014/main" id="{7640A353-116C-4111-91BD-332466B0B1DA}"/>
+                <a16:creationId xmlns:a16="http://schemas.microsoft.com/office/drawing/2014/main" id="{CCA008EA-73EC-4D5E-A97F-978119D16612}"/>
               </a:ext>
             </a:extLst>
           </p:cNvPr>
@@ -11288,7 +11296,7 @@
           <p:cNvPr id="8" name="">
             <a:extLst xmlns:a="http://schemas.openxmlformats.org/drawingml/2006/main">
               <a:ext uri="{FF2B5EF4-FFF2-40B4-BE49-F238E27FC236}">
-                <a16:creationId xmlns:a16="http://schemas.microsoft.com/office/drawing/2014/main" id="{0E874471-6E02-4BF7-8BEA-2589AB7787BF}"/>
+                <a16:creationId xmlns:a16="http://schemas.microsoft.com/office/drawing/2014/main" id="{FD97C6DE-36D1-4286-AA46-F28C327DB1EA}"/>
               </a:ext>
             </a:extLst>
           </p:cNvPr>
@@ -11345,7 +11353,7 @@
           <p:cNvPr id="9" name="">
             <a:extLst xmlns:a="http://schemas.openxmlformats.org/drawingml/2006/main">
               <a:ext uri="{FF2B5EF4-FFF2-40B4-BE49-F238E27FC236}">
-                <a16:creationId xmlns:a16="http://schemas.microsoft.com/office/drawing/2014/main" id="{945110E6-9CCE-4E59-9FE2-5C89534B8273}"/>
+                <a16:creationId xmlns:a16="http://schemas.microsoft.com/office/drawing/2014/main" id="{315393CE-6A72-4FCC-98CC-C0C363AF846D}"/>
               </a:ext>
             </a:extLst>
           </p:cNvPr>
@@ -11406,7 +11414,7 @@
           <p:nvPr/>
         </p:nvPicPr>
         <p:blipFill>
-          <a:blip xmlns:r="http://schemas.openxmlformats.org/officeDocument/2006/relationships" xmlns:a="http://schemas.openxmlformats.org/drawingml/2006/main" r:embed="R4aa02ea236764229"/>
+          <a:blip xmlns:r="http://schemas.openxmlformats.org/officeDocument/2006/relationships" xmlns:a="http://schemas.openxmlformats.org/drawingml/2006/main" r:embed="R26e95afd79e54afb"/>
           <a:stretch xmlns:a="http://schemas.openxmlformats.org/drawingml/2006/main"/>
         </p:blipFill>
         <p:spPr>
@@ -11424,7 +11432,7 @@
           <p:cNvPr id="11" name="">
             <a:extLst xmlns:a="http://schemas.openxmlformats.org/drawingml/2006/main">
               <a:ext uri="{FF2B5EF4-FFF2-40B4-BE49-F238E27FC236}">
-                <a16:creationId xmlns:a16="http://schemas.microsoft.com/office/drawing/2014/main" id="{4A236CF7-BDE2-4108-A905-928300889320}"/>
+                <a16:creationId xmlns:a16="http://schemas.microsoft.com/office/drawing/2014/main" id="{D04AD85B-2AE3-4A11-8199-86B9E7526520}"/>
               </a:ext>
             </a:extLst>
           </p:cNvPr>
@@ -11481,7 +11489,7 @@
           <p:cNvPr id="12" name="">
             <a:extLst xmlns:a="http://schemas.openxmlformats.org/drawingml/2006/main">
               <a:ext uri="{FF2B5EF4-FFF2-40B4-BE49-F238E27FC236}">
-                <a16:creationId xmlns:a16="http://schemas.microsoft.com/office/drawing/2014/main" id="{B5599AAB-B6D0-4A63-AC4A-BCEA966FC8B9}"/>
+                <a16:creationId xmlns:a16="http://schemas.microsoft.com/office/drawing/2014/main" id="{DE9CB84F-3CA0-448D-A4BC-F503E88D91E0}"/>
               </a:ext>
             </a:extLst>
           </p:cNvPr>
@@ -11538,7 +11546,7 @@
           <p:cNvPr id="13" name="">
             <a:extLst xmlns:a="http://schemas.openxmlformats.org/drawingml/2006/main">
               <a:ext uri="{FF2B5EF4-FFF2-40B4-BE49-F238E27FC236}">
-                <a16:creationId xmlns:a16="http://schemas.microsoft.com/office/drawing/2014/main" id="{7A977F1D-AA9E-4432-A84F-F87B1EF21105}"/>
+                <a16:creationId xmlns:a16="http://schemas.microsoft.com/office/drawing/2014/main" id="{C86EFA06-7C1C-4F37-BAB2-F4B2BDF1A47E}"/>
               </a:ext>
             </a:extLst>
           </p:cNvPr>
@@ -11570,7 +11578,7 @@
           <p:cNvPr id="14" name="">
             <a:extLst xmlns:a="http://schemas.openxmlformats.org/drawingml/2006/main">
               <a:ext uri="{FF2B5EF4-FFF2-40B4-BE49-F238E27FC236}">
-                <a16:creationId xmlns:a16="http://schemas.microsoft.com/office/drawing/2014/main" id="{DB0DEAC2-A9B4-4438-9C01-9D591BD00A25}"/>
+                <a16:creationId xmlns:a16="http://schemas.microsoft.com/office/drawing/2014/main" id="{CD93514D-2F79-418D-991F-24BA6F438979}"/>
               </a:ext>
             </a:extLst>
           </p:cNvPr>
@@ -11627,7 +11635,7 @@
           <p:cNvPr id="15" name="">
             <a:extLst xmlns:a="http://schemas.openxmlformats.org/drawingml/2006/main">
               <a:ext uri="{FF2B5EF4-FFF2-40B4-BE49-F238E27FC236}">
-                <a16:creationId xmlns:a16="http://schemas.microsoft.com/office/drawing/2014/main" id="{BAF0DF13-9C71-447D-A643-BD10B29515F2}"/>
+                <a16:creationId xmlns:a16="http://schemas.microsoft.com/office/drawing/2014/main" id="{25026436-38A2-4869-8552-88C89D1B708A}"/>
               </a:ext>
             </a:extLst>
           </p:cNvPr>
@@ -11682,7 +11690,7 @@
     </p:spTree>
     <p:extLst>
       <p:ext uri="{BB962C8B-B14F-4D97-AF65-F5344CB8AC3E}">
-        <p14:creationId xmlns:p14="http://schemas.microsoft.com/office/powerpoint/2010/main" val="398279086"/>
+        <p14:creationId xmlns:p14="http://schemas.microsoft.com/office/powerpoint/2010/main" val="2119525215"/>
       </p:ext>
     </p:extLst>
   </p:cSld>
@@ -11837,7 +11845,7 @@
           <p:cNvPr id="23" name="">
             <a:extLst xmlns:a="http://schemas.openxmlformats.org/drawingml/2006/main">
               <a:ext uri="{FF2B5EF4-FFF2-40B4-BE49-F238E27FC236}">
-                <a16:creationId xmlns:a16="http://schemas.microsoft.com/office/drawing/2014/main" id="{DC4DF888-8BF2-4338-B0B1-7EB8B0420954}"/>
+                <a16:creationId xmlns:a16="http://schemas.microsoft.com/office/drawing/2014/main" id="{08417503-785D-4274-978A-FB473F0938F4}"/>
               </a:ext>
             </a:extLst>
           </p:cNvPr>
@@ -11869,7 +11877,7 @@
           <p:cNvPr id="2" name="">
             <a:extLst xmlns:a="http://schemas.openxmlformats.org/drawingml/2006/main">
               <a:ext uri="{FF2B5EF4-FFF2-40B4-BE49-F238E27FC236}">
-                <a16:creationId xmlns:a16="http://schemas.microsoft.com/office/drawing/2014/main" id="{958E1DC0-7A76-4B9B-B30E-B8C455909135}"/>
+                <a16:creationId xmlns:a16="http://schemas.microsoft.com/office/drawing/2014/main" id="{00F13D47-3DD5-49CF-9BFC-1D943B541F9F}"/>
               </a:ext>
             </a:extLst>
           </p:cNvPr>
@@ -11926,7 +11934,7 @@
           <p:cNvPr id="3" name="">
             <a:extLst xmlns:a="http://schemas.openxmlformats.org/drawingml/2006/main">
               <a:ext uri="{FF2B5EF4-FFF2-40B4-BE49-F238E27FC236}">
-                <a16:creationId xmlns:a16="http://schemas.microsoft.com/office/drawing/2014/main" id="{0D33D9E4-196E-46E5-8B9E-6B8D791ECB15}"/>
+                <a16:creationId xmlns:a16="http://schemas.microsoft.com/office/drawing/2014/main" id="{95E29F68-43D1-4C8F-BEB3-FB06DB372CD8}"/>
               </a:ext>
             </a:extLst>
           </p:cNvPr>
@@ -11958,7 +11966,7 @@
           <p:cNvPr id="4" name="">
             <a:extLst xmlns:a="http://schemas.openxmlformats.org/drawingml/2006/main">
               <a:ext uri="{FF2B5EF4-FFF2-40B4-BE49-F238E27FC236}">
-                <a16:creationId xmlns:a16="http://schemas.microsoft.com/office/drawing/2014/main" id="{216E4BBE-7215-4BC0-8839-9C6A84C3A94B}"/>
+                <a16:creationId xmlns:a16="http://schemas.microsoft.com/office/drawing/2014/main" id="{561876E3-3ABA-418F-A817-2747534B39AC}"/>
               </a:ext>
             </a:extLst>
           </p:cNvPr>
@@ -12015,7 +12023,7 @@
           <p:cNvPr id="5" name="">
             <a:extLst xmlns:a="http://schemas.openxmlformats.org/drawingml/2006/main">
               <a:ext uri="{FF2B5EF4-FFF2-40B4-BE49-F238E27FC236}">
-                <a16:creationId xmlns:a16="http://schemas.microsoft.com/office/drawing/2014/main" id="{E7A671A8-DA3A-425B-AA79-93BE5ADDB3FA}"/>
+                <a16:creationId xmlns:a16="http://schemas.microsoft.com/office/drawing/2014/main" id="{FA37D296-B3B0-4288-BD35-A5E765702601}"/>
               </a:ext>
             </a:extLst>
           </p:cNvPr>
@@ -12072,7 +12080,7 @@
           <p:cNvPr id="6" name="">
             <a:extLst xmlns:a="http://schemas.openxmlformats.org/drawingml/2006/main">
               <a:ext uri="{FF2B5EF4-FFF2-40B4-BE49-F238E27FC236}">
-                <a16:creationId xmlns:a16="http://schemas.microsoft.com/office/drawing/2014/main" id="{1771186A-69DE-410C-A0FA-72841A3D90E3}"/>
+                <a16:creationId xmlns:a16="http://schemas.microsoft.com/office/drawing/2014/main" id="{FAD61E6A-D87F-400B-9287-AE8989C048B1}"/>
               </a:ext>
             </a:extLst>
           </p:cNvPr>
@@ -12129,7 +12137,7 @@
           <p:cNvPr id="7" name="">
             <a:extLst xmlns:a="http://schemas.openxmlformats.org/drawingml/2006/main">
               <a:ext uri="{FF2B5EF4-FFF2-40B4-BE49-F238E27FC236}">
-                <a16:creationId xmlns:a16="http://schemas.microsoft.com/office/drawing/2014/main" id="{DA32D873-9765-4C83-86E7-A13C0F2FBCEA}"/>
+                <a16:creationId xmlns:a16="http://schemas.microsoft.com/office/drawing/2014/main" id="{64845E03-7B87-4751-9360-BA363CBBE3E9}"/>
               </a:ext>
             </a:extLst>
           </p:cNvPr>
@@ -12161,7 +12169,7 @@
           <p:cNvPr id="8" name="">
             <a:extLst xmlns:a="http://schemas.openxmlformats.org/drawingml/2006/main">
               <a:ext uri="{FF2B5EF4-FFF2-40B4-BE49-F238E27FC236}">
-                <a16:creationId xmlns:a16="http://schemas.microsoft.com/office/drawing/2014/main" id="{3D2143EA-6C0E-4FCA-BF77-5106B0E1B9BA}"/>
+                <a16:creationId xmlns:a16="http://schemas.microsoft.com/office/drawing/2014/main" id="{67E2750C-430B-4BE7-8E41-CD91BEB79586}"/>
               </a:ext>
             </a:extLst>
           </p:cNvPr>
@@ -12218,7 +12226,7 @@
           <p:cNvPr id="9" name="">
             <a:extLst xmlns:a="http://schemas.openxmlformats.org/drawingml/2006/main">
               <a:ext uri="{FF2B5EF4-FFF2-40B4-BE49-F238E27FC236}">
-                <a16:creationId xmlns:a16="http://schemas.microsoft.com/office/drawing/2014/main" id="{248C83CE-ED40-4B3D-9064-74C871E95C9B}"/>
+                <a16:creationId xmlns:a16="http://schemas.microsoft.com/office/drawing/2014/main" id="{8D6E2E67-B15B-4DEB-B184-579B4B529E21}"/>
               </a:ext>
             </a:extLst>
           </p:cNvPr>
@@ -12275,7 +12283,7 @@
           <p:cNvPr id="10" name="">
             <a:extLst xmlns:a="http://schemas.openxmlformats.org/drawingml/2006/main">
               <a:ext uri="{FF2B5EF4-FFF2-40B4-BE49-F238E27FC236}">
-                <a16:creationId xmlns:a16="http://schemas.microsoft.com/office/drawing/2014/main" id="{31C3A26B-FE78-4369-80E0-7A402676BC7A}"/>
+                <a16:creationId xmlns:a16="http://schemas.microsoft.com/office/drawing/2014/main" id="{756004C4-536D-41FD-9C86-B86730A28EA4}"/>
               </a:ext>
             </a:extLst>
           </p:cNvPr>
@@ -12309,7 +12317,7 @@
           <p:cNvPr id="11" name="">
             <a:extLst xmlns:a="http://schemas.openxmlformats.org/drawingml/2006/main">
               <a:ext uri="{FF2B5EF4-FFF2-40B4-BE49-F238E27FC236}">
-                <a16:creationId xmlns:a16="http://schemas.microsoft.com/office/drawing/2014/main" id="{820CACCF-E318-4D71-82FD-EBB2C4C89FA2}"/>
+                <a16:creationId xmlns:a16="http://schemas.microsoft.com/office/drawing/2014/main" id="{44F2A488-8D78-4D98-8DE6-AD9AD518BF46}"/>
               </a:ext>
             </a:extLst>
           </p:cNvPr>
@@ -12341,7 +12349,7 @@
           <p:cNvPr id="12" name="">
             <a:extLst xmlns:a="http://schemas.openxmlformats.org/drawingml/2006/main">
               <a:ext uri="{FF2B5EF4-FFF2-40B4-BE49-F238E27FC236}">
-                <a16:creationId xmlns:a16="http://schemas.microsoft.com/office/drawing/2014/main" id="{883BC340-A27E-4F03-92B8-02B236B60337}"/>
+                <a16:creationId xmlns:a16="http://schemas.microsoft.com/office/drawing/2014/main" id="{2A6C36E9-E305-4AA2-ABFF-743E19DD2B98}"/>
               </a:ext>
             </a:extLst>
           </p:cNvPr>
@@ -12398,7 +12406,7 @@
           <p:cNvPr id="13" name="">
             <a:extLst xmlns:a="http://schemas.openxmlformats.org/drawingml/2006/main">
               <a:ext uri="{FF2B5EF4-FFF2-40B4-BE49-F238E27FC236}">
-                <a16:creationId xmlns:a16="http://schemas.microsoft.com/office/drawing/2014/main" id="{294437E3-08FB-4667-8B70-E88339A883C4}"/>
+                <a16:creationId xmlns:a16="http://schemas.microsoft.com/office/drawing/2014/main" id="{F8F79E1B-A1AC-4FFF-A4D3-D700489BF43E}"/>
               </a:ext>
             </a:extLst>
           </p:cNvPr>
@@ -12455,7 +12463,7 @@
           <p:cNvPr id="14" name="">
             <a:extLst xmlns:a="http://schemas.openxmlformats.org/drawingml/2006/main">
               <a:ext uri="{FF2B5EF4-FFF2-40B4-BE49-F238E27FC236}">
-                <a16:creationId xmlns:a16="http://schemas.microsoft.com/office/drawing/2014/main" id="{7046E893-D362-4F0C-B570-15A4805CDB38}"/>
+                <a16:creationId xmlns:a16="http://schemas.microsoft.com/office/drawing/2014/main" id="{131EE7FB-2B52-4FB9-BB10-55EB15D2CDAD}"/>
               </a:ext>
             </a:extLst>
           </p:cNvPr>
@@ -12489,7 +12497,7 @@
           <p:cNvPr id="15" name="">
             <a:extLst xmlns:a="http://schemas.openxmlformats.org/drawingml/2006/main">
               <a:ext uri="{FF2B5EF4-FFF2-40B4-BE49-F238E27FC236}">
-                <a16:creationId xmlns:a16="http://schemas.microsoft.com/office/drawing/2014/main" id="{FC5C0CE6-9D09-4C55-80BC-1225D88C0A4D}"/>
+                <a16:creationId xmlns:a16="http://schemas.microsoft.com/office/drawing/2014/main" id="{9DE78FB3-1811-4388-82E0-E7BDC4151664}"/>
               </a:ext>
             </a:extLst>
           </p:cNvPr>
@@ -12521,7 +12529,7 @@
           <p:cNvPr id="16" name="">
             <a:extLst xmlns:a="http://schemas.openxmlformats.org/drawingml/2006/main">
               <a:ext uri="{FF2B5EF4-FFF2-40B4-BE49-F238E27FC236}">
-                <a16:creationId xmlns:a16="http://schemas.microsoft.com/office/drawing/2014/main" id="{CB7596A7-536D-496F-A5AC-25C96DDEFE49}"/>
+                <a16:creationId xmlns:a16="http://schemas.microsoft.com/office/drawing/2014/main" id="{016A4918-0131-4A36-9088-DF669DC9E7F8}"/>
               </a:ext>
             </a:extLst>
           </p:cNvPr>
@@ -12578,7 +12586,7 @@
           <p:cNvPr id="17" name="">
             <a:extLst xmlns:a="http://schemas.openxmlformats.org/drawingml/2006/main">
               <a:ext uri="{FF2B5EF4-FFF2-40B4-BE49-F238E27FC236}">
-                <a16:creationId xmlns:a16="http://schemas.microsoft.com/office/drawing/2014/main" id="{7680EF9B-E2E8-41C3-929D-A7AAC4657A58}"/>
+                <a16:creationId xmlns:a16="http://schemas.microsoft.com/office/drawing/2014/main" id="{CF26A6D7-2278-4B0B-ABBC-DEEAEB2CDDA0}"/>
               </a:ext>
             </a:extLst>
           </p:cNvPr>
@@ -12635,7 +12643,7 @@
           <p:cNvPr id="18" name="">
             <a:extLst xmlns:a="http://schemas.openxmlformats.org/drawingml/2006/main">
               <a:ext uri="{FF2B5EF4-FFF2-40B4-BE49-F238E27FC236}">
-                <a16:creationId xmlns:a16="http://schemas.microsoft.com/office/drawing/2014/main" id="{B2A75F47-9519-403B-B3C8-19E417C9BABA}"/>
+                <a16:creationId xmlns:a16="http://schemas.microsoft.com/office/drawing/2014/main" id="{9C3396F7-8AAA-4E83-9310-406B20C69F94}"/>
               </a:ext>
             </a:extLst>
           </p:cNvPr>
@@ -12669,7 +12677,7 @@
           <p:cNvPr id="19" name="">
             <a:extLst xmlns:a="http://schemas.openxmlformats.org/drawingml/2006/main">
               <a:ext uri="{FF2B5EF4-FFF2-40B4-BE49-F238E27FC236}">
-                <a16:creationId xmlns:a16="http://schemas.microsoft.com/office/drawing/2014/main" id="{27A49EDE-B789-477A-926F-688A8350446C}"/>
+                <a16:creationId xmlns:a16="http://schemas.microsoft.com/office/drawing/2014/main" id="{FE731839-669C-4DDE-85DA-F4770A381745}"/>
               </a:ext>
             </a:extLst>
           </p:cNvPr>
@@ -12701,7 +12709,7 @@
           <p:cNvPr id="20" name="">
             <a:extLst xmlns:a="http://schemas.openxmlformats.org/drawingml/2006/main">
               <a:ext uri="{FF2B5EF4-FFF2-40B4-BE49-F238E27FC236}">
-                <a16:creationId xmlns:a16="http://schemas.microsoft.com/office/drawing/2014/main" id="{CC21DF64-08DA-4C08-87AE-DE2BDFFF2702}"/>
+                <a16:creationId xmlns:a16="http://schemas.microsoft.com/office/drawing/2014/main" id="{C139A7CD-E7C0-4177-B3EE-F1FEDDB81DE5}"/>
               </a:ext>
             </a:extLst>
           </p:cNvPr>
@@ -12758,7 +12766,7 @@
           <p:cNvPr id="21" name="">
             <a:extLst xmlns:a="http://schemas.openxmlformats.org/drawingml/2006/main">
               <a:ext uri="{FF2B5EF4-FFF2-40B4-BE49-F238E27FC236}">
-                <a16:creationId xmlns:a16="http://schemas.microsoft.com/office/drawing/2014/main" id="{96F7F471-648D-4265-904F-4215A4E039A4}"/>
+                <a16:creationId xmlns:a16="http://schemas.microsoft.com/office/drawing/2014/main" id="{3520F7A9-88DD-48CE-8ADD-B4E6F90CEA9F}"/>
               </a:ext>
             </a:extLst>
           </p:cNvPr>
@@ -12815,7 +12823,7 @@
           <p:cNvPr id="22" name="">
             <a:extLst xmlns:a="http://schemas.openxmlformats.org/drawingml/2006/main">
               <a:ext uri="{FF2B5EF4-FFF2-40B4-BE49-F238E27FC236}">
-                <a16:creationId xmlns:a16="http://schemas.microsoft.com/office/drawing/2014/main" id="{F7B3BF95-F986-48D7-918B-DFD82AA86E77}"/>
+                <a16:creationId xmlns:a16="http://schemas.microsoft.com/office/drawing/2014/main" id="{896983BF-4E30-4D35-B121-33C74ACC55F0}"/>
               </a:ext>
             </a:extLst>
           </p:cNvPr>
@@ -12870,7 +12878,7 @@
     </p:spTree>
     <p:extLst>
       <p:ext uri="{BB962C8B-B14F-4D97-AF65-F5344CB8AC3E}">
-        <p14:creationId xmlns:p14="http://schemas.microsoft.com/office/powerpoint/2010/main" val="443300692"/>
+        <p14:creationId xmlns:p14="http://schemas.microsoft.com/office/powerpoint/2010/main" val="500399237"/>
       </p:ext>
     </p:extLst>
   </p:cSld>
@@ -13071,7 +13079,7 @@
           <p:cNvPr id="22" name="">
             <a:extLst xmlns:a="http://schemas.openxmlformats.org/drawingml/2006/main">
               <a:ext uri="{FF2B5EF4-FFF2-40B4-BE49-F238E27FC236}">
-                <a16:creationId xmlns:a16="http://schemas.microsoft.com/office/drawing/2014/main" id="{2DD1781A-B142-4401-AEEC-D618E4A94F98}"/>
+                <a16:creationId xmlns:a16="http://schemas.microsoft.com/office/drawing/2014/main" id="{8B05FA3C-3553-4F6C-8F5C-1F2159DC81CD}"/>
               </a:ext>
             </a:extLst>
           </p:cNvPr>
@@ -13103,7 +13111,7 @@
           <p:cNvPr id="2" name="">
             <a:extLst xmlns:a="http://schemas.openxmlformats.org/drawingml/2006/main">
               <a:ext uri="{FF2B5EF4-FFF2-40B4-BE49-F238E27FC236}">
-                <a16:creationId xmlns:a16="http://schemas.microsoft.com/office/drawing/2014/main" id="{B3A6C291-CE18-4B9B-8198-CFE09CB26094}"/>
+                <a16:creationId xmlns:a16="http://schemas.microsoft.com/office/drawing/2014/main" id="{6CA75C5A-B974-4F4E-8CA1-534E66CFF423}"/>
               </a:ext>
             </a:extLst>
           </p:cNvPr>
@@ -13160,7 +13168,7 @@
           <p:cNvPr id="3" name="">
             <a:extLst xmlns:a="http://schemas.openxmlformats.org/drawingml/2006/main">
               <a:ext uri="{FF2B5EF4-FFF2-40B4-BE49-F238E27FC236}">
-                <a16:creationId xmlns:a16="http://schemas.microsoft.com/office/drawing/2014/main" id="{2C30F2F4-631D-43E3-B574-3F5E05BA940B}"/>
+                <a16:creationId xmlns:a16="http://schemas.microsoft.com/office/drawing/2014/main" id="{9CFBC167-3AB9-44DE-AD23-84BCFD15EC5F}"/>
               </a:ext>
             </a:extLst>
           </p:cNvPr>
@@ -13192,7 +13200,7 @@
           <p:cNvPr id="4" name="">
             <a:extLst xmlns:a="http://schemas.openxmlformats.org/drawingml/2006/main">
               <a:ext uri="{FF2B5EF4-FFF2-40B4-BE49-F238E27FC236}">
-                <a16:creationId xmlns:a16="http://schemas.microsoft.com/office/drawing/2014/main" id="{06BA0144-99AF-44FC-828B-BE6565F770E5}"/>
+                <a16:creationId xmlns:a16="http://schemas.microsoft.com/office/drawing/2014/main" id="{AB6E681F-7C5B-41EF-85D8-5DDD7FE430AA}"/>
               </a:ext>
             </a:extLst>
           </p:cNvPr>
@@ -13249,7 +13257,7 @@
           <p:cNvPr id="5" name="">
             <a:extLst xmlns:a="http://schemas.openxmlformats.org/drawingml/2006/main">
               <a:ext uri="{FF2B5EF4-FFF2-40B4-BE49-F238E27FC236}">
-                <a16:creationId xmlns:a16="http://schemas.microsoft.com/office/drawing/2014/main" id="{0C40F791-2194-4BAF-B6C3-FD20388C1679}"/>
+                <a16:creationId xmlns:a16="http://schemas.microsoft.com/office/drawing/2014/main" id="{A6068759-D22D-41E7-B00F-719BC67E3CC1}"/>
               </a:ext>
             </a:extLst>
           </p:cNvPr>
@@ -13306,7 +13314,7 @@
           <p:cNvPr id="6" name="">
             <a:extLst xmlns:a="http://schemas.openxmlformats.org/drawingml/2006/main">
               <a:ext uri="{FF2B5EF4-FFF2-40B4-BE49-F238E27FC236}">
-                <a16:creationId xmlns:a16="http://schemas.microsoft.com/office/drawing/2014/main" id="{9C32270B-7D3D-41C9-A693-F6956E83F511}"/>
+                <a16:creationId xmlns:a16="http://schemas.microsoft.com/office/drawing/2014/main" id="{AA849491-9C58-4C88-B0E8-9F5773FBD7F6}"/>
               </a:ext>
             </a:extLst>
           </p:cNvPr>
@@ -13363,7 +13371,7 @@
           <p:cNvPr id="7" name="">
             <a:extLst xmlns:a="http://schemas.openxmlformats.org/drawingml/2006/main">
               <a:ext uri="{FF2B5EF4-FFF2-40B4-BE49-F238E27FC236}">
-                <a16:creationId xmlns:a16="http://schemas.microsoft.com/office/drawing/2014/main" id="{B994EEA1-01C0-4B40-8172-6CB6D76F948A}"/>
+                <a16:creationId xmlns:a16="http://schemas.microsoft.com/office/drawing/2014/main" id="{1F9AA519-A571-4FEF-B4FB-0BFD6EF75346}"/>
               </a:ext>
             </a:extLst>
           </p:cNvPr>
@@ -13395,7 +13403,7 @@
           <p:cNvPr id="8" name="">
             <a:extLst xmlns:a="http://schemas.openxmlformats.org/drawingml/2006/main">
               <a:ext uri="{FF2B5EF4-FFF2-40B4-BE49-F238E27FC236}">
-                <a16:creationId xmlns:a16="http://schemas.microsoft.com/office/drawing/2014/main" id="{6D9BD68D-2D9F-418E-8F68-522569F4727E}"/>
+                <a16:creationId xmlns:a16="http://schemas.microsoft.com/office/drawing/2014/main" id="{FE100BAB-D84A-450E-982B-FEA28AA376B8}"/>
               </a:ext>
             </a:extLst>
           </p:cNvPr>
@@ -13452,7 +13460,7 @@
           <p:cNvPr id="9" name="">
             <a:extLst xmlns:a="http://schemas.openxmlformats.org/drawingml/2006/main">
               <a:ext uri="{FF2B5EF4-FFF2-40B4-BE49-F238E27FC236}">
-                <a16:creationId xmlns:a16="http://schemas.microsoft.com/office/drawing/2014/main" id="{0F0ED585-38A7-42CA-AAD8-A146AD0D112A}"/>
+                <a16:creationId xmlns:a16="http://schemas.microsoft.com/office/drawing/2014/main" id="{2A862DA2-ECAA-4945-8A58-3F2902E11C40}"/>
               </a:ext>
             </a:extLst>
           </p:cNvPr>
@@ -13509,7 +13517,7 @@
           <p:cNvPr id="10" name="">
             <a:extLst xmlns:a="http://schemas.openxmlformats.org/drawingml/2006/main">
               <a:ext uri="{FF2B5EF4-FFF2-40B4-BE49-F238E27FC236}">
-                <a16:creationId xmlns:a16="http://schemas.microsoft.com/office/drawing/2014/main" id="{1C3403F4-7388-40EC-AB1E-6EC7E3DF1478}"/>
+                <a16:creationId xmlns:a16="http://schemas.microsoft.com/office/drawing/2014/main" id="{5909B66F-0351-42E9-A1DD-26BB258CF0DD}"/>
               </a:ext>
             </a:extLst>
           </p:cNvPr>
@@ -13543,7 +13551,7 @@
           <p:cNvPr id="11" name="">
             <a:extLst xmlns:a="http://schemas.openxmlformats.org/drawingml/2006/main">
               <a:ext uri="{FF2B5EF4-FFF2-40B4-BE49-F238E27FC236}">
-                <a16:creationId xmlns:a16="http://schemas.microsoft.com/office/drawing/2014/main" id="{785C650D-8291-4BE5-88BE-9DBD982A20AB}"/>
+                <a16:creationId xmlns:a16="http://schemas.microsoft.com/office/drawing/2014/main" id="{1AB9758C-6D45-43A1-A624-1BFA76E6014C}"/>
               </a:ext>
             </a:extLst>
           </p:cNvPr>
@@ -13575,7 +13583,7 @@
           <p:cNvPr id="12" name="">
             <a:extLst xmlns:a="http://schemas.openxmlformats.org/drawingml/2006/main">
               <a:ext uri="{FF2B5EF4-FFF2-40B4-BE49-F238E27FC236}">
-                <a16:creationId xmlns:a16="http://schemas.microsoft.com/office/drawing/2014/main" id="{63D648EC-C00E-400D-8373-7763E6E38FAF}"/>
+                <a16:creationId xmlns:a16="http://schemas.microsoft.com/office/drawing/2014/main" id="{56CD7991-989A-4CF1-A530-7093727D39C3}"/>
               </a:ext>
             </a:extLst>
           </p:cNvPr>
@@ -13632,7 +13640,7 @@
           <p:cNvPr id="13" name="">
             <a:extLst xmlns:a="http://schemas.openxmlformats.org/drawingml/2006/main">
               <a:ext uri="{FF2B5EF4-FFF2-40B4-BE49-F238E27FC236}">
-                <a16:creationId xmlns:a16="http://schemas.microsoft.com/office/drawing/2014/main" id="{1BA4D284-1D9C-49EE-9FE9-0F5D619F0714}"/>
+                <a16:creationId xmlns:a16="http://schemas.microsoft.com/office/drawing/2014/main" id="{3E6F6780-0AEE-444E-8C47-8B6689EECBBD}"/>
               </a:ext>
             </a:extLst>
           </p:cNvPr>
@@ -13689,7 +13697,7 @@
           <p:cNvPr id="14" name="">
             <a:extLst xmlns:a="http://schemas.openxmlformats.org/drawingml/2006/main">
               <a:ext uri="{FF2B5EF4-FFF2-40B4-BE49-F238E27FC236}">
-                <a16:creationId xmlns:a16="http://schemas.microsoft.com/office/drawing/2014/main" id="{D759B0AD-8B30-41EA-B2BF-B5E921FBFA6C}"/>
+                <a16:creationId xmlns:a16="http://schemas.microsoft.com/office/drawing/2014/main" id="{EE6F0735-E7D6-4904-A05E-61EF385B9A17}"/>
               </a:ext>
             </a:extLst>
           </p:cNvPr>
@@ -13723,7 +13731,7 @@
           <p:cNvPr id="15" name="">
             <a:extLst xmlns:a="http://schemas.openxmlformats.org/drawingml/2006/main">
               <a:ext uri="{FF2B5EF4-FFF2-40B4-BE49-F238E27FC236}">
-                <a16:creationId xmlns:a16="http://schemas.microsoft.com/office/drawing/2014/main" id="{01CB8965-B84E-4CAD-81D3-83414C604D73}"/>
+                <a16:creationId xmlns:a16="http://schemas.microsoft.com/office/drawing/2014/main" id="{5B1ABF37-18AB-453A-B980-48FF1180D749}"/>
               </a:ext>
             </a:extLst>
           </p:cNvPr>
@@ -13755,7 +13763,7 @@
           <p:cNvPr id="16" name="">
             <a:extLst xmlns:a="http://schemas.openxmlformats.org/drawingml/2006/main">
               <a:ext uri="{FF2B5EF4-FFF2-40B4-BE49-F238E27FC236}">
-                <a16:creationId xmlns:a16="http://schemas.microsoft.com/office/drawing/2014/main" id="{1D606784-9E5C-40D4-9B78-E90ACC8FAE37}"/>
+                <a16:creationId xmlns:a16="http://schemas.microsoft.com/office/drawing/2014/main" id="{8AAE8516-6F4C-497E-8350-C4FC2D79AE05}"/>
               </a:ext>
             </a:extLst>
           </p:cNvPr>
@@ -13812,7 +13820,7 @@
           <p:cNvPr id="17" name="">
             <a:extLst xmlns:a="http://schemas.openxmlformats.org/drawingml/2006/main">
               <a:ext uri="{FF2B5EF4-FFF2-40B4-BE49-F238E27FC236}">
-                <a16:creationId xmlns:a16="http://schemas.microsoft.com/office/drawing/2014/main" id="{54D70509-B830-45E6-B315-F95E4FED5D67}"/>
+                <a16:creationId xmlns:a16="http://schemas.microsoft.com/office/drawing/2014/main" id="{67B588F2-930F-42DB-B837-44EFB262F093}"/>
               </a:ext>
             </a:extLst>
           </p:cNvPr>
@@ -13869,7 +13877,7 @@
           <p:cNvPr id="18" name="">
             <a:extLst xmlns:a="http://schemas.openxmlformats.org/drawingml/2006/main">
               <a:ext uri="{FF2B5EF4-FFF2-40B4-BE49-F238E27FC236}">
-                <a16:creationId xmlns:a16="http://schemas.microsoft.com/office/drawing/2014/main" id="{925E48A5-BDA2-4222-A0E8-9AF9C8539F0A}"/>
+                <a16:creationId xmlns:a16="http://schemas.microsoft.com/office/drawing/2014/main" id="{BEA372C7-8EF6-4D2E-ACB2-3866CA363F44}"/>
               </a:ext>
             </a:extLst>
           </p:cNvPr>
@@ -13903,7 +13911,7 @@
           <p:cNvPr id="19" name="">
             <a:extLst xmlns:a="http://schemas.openxmlformats.org/drawingml/2006/main">
               <a:ext uri="{FF2B5EF4-FFF2-40B4-BE49-F238E27FC236}">
-                <a16:creationId xmlns:a16="http://schemas.microsoft.com/office/drawing/2014/main" id="{2ECA7274-D7F6-4B16-ACE0-EC988318F520}"/>
+                <a16:creationId xmlns:a16="http://schemas.microsoft.com/office/drawing/2014/main" id="{DE95A8A4-406F-4587-88FD-F7F109B118FA}"/>
               </a:ext>
             </a:extLst>
           </p:cNvPr>
@@ -13935,7 +13943,7 @@
           <p:cNvPr id="20" name="">
             <a:extLst xmlns:a="http://schemas.openxmlformats.org/drawingml/2006/main">
               <a:ext uri="{FF2B5EF4-FFF2-40B4-BE49-F238E27FC236}">
-                <a16:creationId xmlns:a16="http://schemas.microsoft.com/office/drawing/2014/main" id="{CF7F19CF-0A88-4FE3-9953-E381C5B3183A}"/>
+                <a16:creationId xmlns:a16="http://schemas.microsoft.com/office/drawing/2014/main" id="{3BBF7BDA-B2E8-486F-ADE9-6CDE33696B78}"/>
               </a:ext>
             </a:extLst>
           </p:cNvPr>
@@ -13992,7 +14000,7 @@
           <p:cNvPr id="21" name="">
             <a:extLst xmlns:a="http://schemas.openxmlformats.org/drawingml/2006/main">
               <a:ext uri="{FF2B5EF4-FFF2-40B4-BE49-F238E27FC236}">
-                <a16:creationId xmlns:a16="http://schemas.microsoft.com/office/drawing/2014/main" id="{8EAFC9EC-ADCD-4D3E-9ADD-63E7747FFFA4}"/>
+                <a16:creationId xmlns:a16="http://schemas.microsoft.com/office/drawing/2014/main" id="{E9023726-6D66-4862-A122-DFDB8E12216C}"/>
               </a:ext>
             </a:extLst>
           </p:cNvPr>
@@ -14047,7 +14055,7 @@
     </p:spTree>
     <p:extLst>
       <p:ext uri="{BB962C8B-B14F-4D97-AF65-F5344CB8AC3E}">
-        <p14:creationId xmlns:p14="http://schemas.microsoft.com/office/powerpoint/2010/main" val="1072344675"/>
+        <p14:creationId xmlns:p14="http://schemas.microsoft.com/office/powerpoint/2010/main" val="1372385635"/>
       </p:ext>
     </p:extLst>
   </p:cSld>
